--- a/ゲーム科2年/01_後期/ゲームプログラミング応用Ⅰ/01_HLSL.pptx
+++ b/ゲーム科2年/01_後期/ゲームプログラミング応用Ⅰ/01_HLSL.pptx
@@ -6,18 +6,20 @@
   </p:sldMasterIdLst>
   <p:sldIdLst>
     <p:sldId id="257" r:id="rId2"/>
-    <p:sldId id="258" r:id="rId3"/>
-    <p:sldId id="259" r:id="rId4"/>
-    <p:sldId id="260" r:id="rId5"/>
-    <p:sldId id="261" r:id="rId6"/>
-    <p:sldId id="262" r:id="rId7"/>
-    <p:sldId id="263" r:id="rId8"/>
-    <p:sldId id="264" r:id="rId9"/>
-    <p:sldId id="265" r:id="rId10"/>
-    <p:sldId id="266" r:id="rId11"/>
-    <p:sldId id="267" r:id="rId12"/>
-    <p:sldId id="268" r:id="rId13"/>
-    <p:sldId id="269" r:id="rId14"/>
+    <p:sldId id="259" r:id="rId3"/>
+    <p:sldId id="260" r:id="rId4"/>
+    <p:sldId id="261" r:id="rId5"/>
+    <p:sldId id="262" r:id="rId6"/>
+    <p:sldId id="263" r:id="rId7"/>
+    <p:sldId id="264" r:id="rId8"/>
+    <p:sldId id="265" r:id="rId9"/>
+    <p:sldId id="266" r:id="rId10"/>
+    <p:sldId id="267" r:id="rId11"/>
+    <p:sldId id="268" r:id="rId12"/>
+    <p:sldId id="269" r:id="rId13"/>
+    <p:sldId id="270" r:id="rId14"/>
+    <p:sldId id="271" r:id="rId15"/>
+    <p:sldId id="272" r:id="rId16"/>
   </p:sldIdLst>
   <p:sldSz cx="12192000" cy="6858000"/>
   <p:notesSz cx="6858000" cy="9144000"/>
@@ -271,7 +273,7 @@
           <a:p>
             <a:fld id="{E9CC885B-4903-4D54-9A93-00025F12DED9}" type="datetimeFigureOut">
               <a:rPr kumimoji="1" lang="ja-JP" altLang="en-US" smtClean="0"/>
-              <a:t>2025/7/15</a:t>
+              <a:t>2025/7/17</a:t>
             </a:fld>
             <a:endParaRPr kumimoji="1" lang="ja-JP" altLang="en-US"/>
           </a:p>
@@ -501,7 +503,7 @@
           <a:p>
             <a:fld id="{E9CC885B-4903-4D54-9A93-00025F12DED9}" type="datetimeFigureOut">
               <a:rPr kumimoji="1" lang="ja-JP" altLang="en-US" smtClean="0"/>
-              <a:t>2025/7/15</a:t>
+              <a:t>2025/7/17</a:t>
             </a:fld>
             <a:endParaRPr kumimoji="1" lang="ja-JP" altLang="en-US"/>
           </a:p>
@@ -741,7 +743,7 @@
           <a:p>
             <a:fld id="{E9CC885B-4903-4D54-9A93-00025F12DED9}" type="datetimeFigureOut">
               <a:rPr kumimoji="1" lang="ja-JP" altLang="en-US" smtClean="0"/>
-              <a:t>2025/7/15</a:t>
+              <a:t>2025/7/17</a:t>
             </a:fld>
             <a:endParaRPr kumimoji="1" lang="ja-JP" altLang="en-US"/>
           </a:p>
@@ -971,7 +973,7 @@
           <a:p>
             <a:fld id="{E9CC885B-4903-4D54-9A93-00025F12DED9}" type="datetimeFigureOut">
               <a:rPr kumimoji="1" lang="ja-JP" altLang="en-US" smtClean="0"/>
-              <a:t>2025/7/15</a:t>
+              <a:t>2025/7/17</a:t>
             </a:fld>
             <a:endParaRPr kumimoji="1" lang="ja-JP" altLang="en-US"/>
           </a:p>
@@ -1246,7 +1248,7 @@
           <a:p>
             <a:fld id="{E9CC885B-4903-4D54-9A93-00025F12DED9}" type="datetimeFigureOut">
               <a:rPr kumimoji="1" lang="ja-JP" altLang="en-US" smtClean="0"/>
-              <a:t>2025/7/15</a:t>
+              <a:t>2025/7/17</a:t>
             </a:fld>
             <a:endParaRPr kumimoji="1" lang="ja-JP" altLang="en-US"/>
           </a:p>
@@ -1575,7 +1577,7 @@
           <a:p>
             <a:fld id="{E9CC885B-4903-4D54-9A93-00025F12DED9}" type="datetimeFigureOut">
               <a:rPr kumimoji="1" lang="ja-JP" altLang="en-US" smtClean="0"/>
-              <a:t>2025/7/15</a:t>
+              <a:t>2025/7/17</a:t>
             </a:fld>
             <a:endParaRPr kumimoji="1" lang="ja-JP" altLang="en-US"/>
           </a:p>
@@ -2051,7 +2053,7 @@
           <a:p>
             <a:fld id="{E9CC885B-4903-4D54-9A93-00025F12DED9}" type="datetimeFigureOut">
               <a:rPr kumimoji="1" lang="ja-JP" altLang="en-US" smtClean="0"/>
-              <a:t>2025/7/15</a:t>
+              <a:t>2025/7/17</a:t>
             </a:fld>
             <a:endParaRPr kumimoji="1" lang="ja-JP" altLang="en-US"/>
           </a:p>
@@ -2192,7 +2194,7 @@
           <a:p>
             <a:fld id="{E9CC885B-4903-4D54-9A93-00025F12DED9}" type="datetimeFigureOut">
               <a:rPr kumimoji="1" lang="ja-JP" altLang="en-US" smtClean="0"/>
-              <a:t>2025/7/15</a:t>
+              <a:t>2025/7/17</a:t>
             </a:fld>
             <a:endParaRPr kumimoji="1" lang="ja-JP" altLang="en-US"/>
           </a:p>
@@ -2305,7 +2307,7 @@
           <a:p>
             <a:fld id="{E9CC885B-4903-4D54-9A93-00025F12DED9}" type="datetimeFigureOut">
               <a:rPr kumimoji="1" lang="ja-JP" altLang="en-US" smtClean="0"/>
-              <a:t>2025/7/15</a:t>
+              <a:t>2025/7/17</a:t>
             </a:fld>
             <a:endParaRPr kumimoji="1" lang="ja-JP" altLang="en-US"/>
           </a:p>
@@ -2648,7 +2650,7 @@
           <a:p>
             <a:fld id="{E9CC885B-4903-4D54-9A93-00025F12DED9}" type="datetimeFigureOut">
               <a:rPr kumimoji="1" lang="ja-JP" altLang="en-US" smtClean="0"/>
-              <a:t>2025/7/15</a:t>
+              <a:t>2025/7/17</a:t>
             </a:fld>
             <a:endParaRPr kumimoji="1" lang="ja-JP" altLang="en-US"/>
           </a:p>
@@ -2936,7 +2938,7 @@
           <a:p>
             <a:fld id="{E9CC885B-4903-4D54-9A93-00025F12DED9}" type="datetimeFigureOut">
               <a:rPr kumimoji="1" lang="ja-JP" altLang="en-US" smtClean="0"/>
-              <a:t>2025/7/15</a:t>
+              <a:t>2025/7/17</a:t>
             </a:fld>
             <a:endParaRPr kumimoji="1" lang="ja-JP" altLang="en-US"/>
           </a:p>
@@ -3209,7 +3211,7 @@
           <a:p>
             <a:fld id="{E9CC885B-4903-4D54-9A93-00025F12DED9}" type="datetimeFigureOut">
               <a:rPr kumimoji="1" lang="ja-JP" altLang="en-US" smtClean="0"/>
-              <a:t>2025/7/15</a:t>
+              <a:t>2025/7/17</a:t>
             </a:fld>
             <a:endParaRPr kumimoji="1" lang="ja-JP" altLang="en-US"/>
           </a:p>
@@ -3758,10 +3760,10 @@
       </p:sp>
       <p:pic>
         <p:nvPicPr>
-          <p:cNvPr id="3" name="図 2">
-            <a:extLst>
-              <a:ext uri="{FF2B5EF4-FFF2-40B4-BE49-F238E27FC236}">
-                <a16:creationId xmlns:a16="http://schemas.microsoft.com/office/drawing/2014/main" id="{C2A6958F-F4A5-42A8-B8E0-DE53E6035C86}"/>
+          <p:cNvPr id="5" name="図 4">
+            <a:extLst>
+              <a:ext uri="{FF2B5EF4-FFF2-40B4-BE49-F238E27FC236}">
+                <a16:creationId xmlns:a16="http://schemas.microsoft.com/office/drawing/2014/main" id="{9D0449A3-63C3-4179-B42F-0AA924F8F71E}"/>
               </a:ext>
             </a:extLst>
           </p:cNvPr>
@@ -3778,8 +3780,8 @@
         </p:blipFill>
         <p:spPr>
           <a:xfrm>
-            <a:off x="567542" y="2556458"/>
-            <a:ext cx="10779727" cy="3632574"/>
+            <a:off x="567542" y="2416758"/>
+            <a:ext cx="7632698" cy="4102575"/>
           </a:xfrm>
           <a:prstGeom prst="rect">
             <a:avLst/>
@@ -3867,7 +3869,7 @@
         <p:spPr>
           <a:xfrm>
             <a:off x="567542" y="1216429"/>
-            <a:ext cx="8701421" cy="1938992"/>
+            <a:ext cx="9110186" cy="830997"/>
           </a:xfrm>
           <a:prstGeom prst="rect">
             <a:avLst/>
@@ -3881,101 +3883,17 @@
           <a:lstStyle/>
           <a:p>
             <a:r>
-              <a:rPr kumimoji="1" lang="ja-JP" altLang="en-US" sz="2400" dirty="0"/>
-              <a:t>シェーダーのコンパイルには</a:t>
-            </a:r>
-            <a:r>
-              <a:rPr kumimoji="1" lang="en-US" altLang="ja-JP" sz="2400" b="1" dirty="0" err="1">
-                <a:solidFill>
-                  <a:srgbClr val="FF0000"/>
-                </a:solidFill>
-              </a:rPr>
-              <a:t>DxLib</a:t>
-            </a:r>
-            <a:r>
-              <a:rPr kumimoji="1" lang="ja-JP" altLang="en-US" sz="2400" b="1" dirty="0">
-                <a:solidFill>
-                  <a:srgbClr val="FF0000"/>
-                </a:solidFill>
-              </a:rPr>
-              <a:t>専用のツール</a:t>
-            </a:r>
-            <a:r>
-              <a:rPr kumimoji="1" lang="ja-JP" altLang="en-US" sz="2400" dirty="0"/>
-              <a:t>を使います。</a:t>
-            </a:r>
-            <a:endParaRPr kumimoji="1" lang="en-US" altLang="ja-JP" sz="2400" dirty="0"/>
-          </a:p>
-          <a:p>
-            <a:r>
               <a:rPr lang="ja-JP" altLang="en-US" sz="2400" dirty="0"/>
-              <a:t>「</a:t>
-            </a:r>
-            <a:r>
-              <a:rPr lang="en-US" altLang="ja-JP" sz="2400" b="1" dirty="0" err="1">
-                <a:solidFill>
-                  <a:srgbClr val="FF0000"/>
-                </a:solidFill>
-              </a:rPr>
-              <a:t>DxLib_VC</a:t>
-            </a:r>
-            <a:r>
-              <a:rPr lang="en-US" altLang="ja-JP" sz="2400" b="1" dirty="0">
-                <a:solidFill>
-                  <a:srgbClr val="FF0000"/>
-                </a:solidFill>
-              </a:rPr>
-              <a:t> &gt; Tool &gt; </a:t>
-            </a:r>
-            <a:r>
-              <a:rPr lang="en-US" altLang="ja-JP" sz="2400" b="1" dirty="0" err="1">
-                <a:solidFill>
-                  <a:srgbClr val="FF0000"/>
-                </a:solidFill>
-              </a:rPr>
-              <a:t>ShaderCompiler</a:t>
-            </a:r>
+              <a:t>キューブを配置してマテリアルを適用させましょう。</a:t>
+            </a:r>
+            <a:endParaRPr lang="en-US" altLang="ja-JP" sz="2400" dirty="0"/>
+          </a:p>
+          <a:p>
             <a:r>
               <a:rPr lang="ja-JP" altLang="en-US" sz="2400" dirty="0"/>
-              <a:t>」にある、</a:t>
-            </a:r>
-            <a:r>
-              <a:rPr lang="en-US" altLang="ja-JP" sz="2400" dirty="0"/>
-              <a:t> </a:t>
-            </a:r>
-          </a:p>
-          <a:p>
-            <a:r>
-              <a:rPr lang="en-US" altLang="ja-JP" sz="2400" b="1" dirty="0">
-                <a:solidFill>
-                  <a:srgbClr val="FF0000"/>
-                </a:solidFill>
-              </a:rPr>
-              <a:t>ShaderCompiler.exe</a:t>
-            </a:r>
-            <a:r>
-              <a:rPr lang="ja-JP" altLang="en-US" sz="2400" dirty="0"/>
-              <a:t>を使います。</a:t>
+              <a:t>これでキューブは先ほどのシェーダーによって描画されます。</a:t>
             </a:r>
             <a:endParaRPr lang="en-US" altLang="ja-JP" sz="2400" dirty="0"/>
-          </a:p>
-          <a:p>
-            <a:endParaRPr kumimoji="1" lang="en-US" altLang="ja-JP" sz="2400" dirty="0"/>
-          </a:p>
-          <a:p>
-            <a:r>
-              <a:rPr lang="ja-JP" altLang="en-US" sz="2400" dirty="0"/>
-              <a:t>今回はすでに</a:t>
-            </a:r>
-            <a:r>
-              <a:rPr lang="en-US" altLang="ja-JP" sz="2400" dirty="0"/>
-              <a:t>Resource</a:t>
-            </a:r>
-            <a:r>
-              <a:rPr lang="ja-JP" altLang="en-US" sz="2400" dirty="0"/>
-              <a:t>フォルダに用意しています。</a:t>
-            </a:r>
-            <a:endParaRPr kumimoji="1" lang="en-US" altLang="ja-JP" sz="2400" dirty="0"/>
           </a:p>
         </p:txBody>
       </p:sp>
@@ -3984,7 +3902,7 @@
           <p:cNvPr id="3" name="図 2">
             <a:extLst>
               <a:ext uri="{FF2B5EF4-FFF2-40B4-BE49-F238E27FC236}">
-                <a16:creationId xmlns:a16="http://schemas.microsoft.com/office/drawing/2014/main" id="{D1F7A298-7514-46F6-B53D-4C25AC24F29F}"/>
+                <a16:creationId xmlns:a16="http://schemas.microsoft.com/office/drawing/2014/main" id="{2D0B5676-10A4-4392-A271-7ED848BE00BC}"/>
               </a:ext>
             </a:extLst>
           </p:cNvPr>
@@ -4001,70 +3919,18 @@
         </p:blipFill>
         <p:spPr>
           <a:xfrm>
-            <a:off x="567542" y="3295121"/>
-            <a:ext cx="4170055" cy="2750079"/>
+            <a:off x="567542" y="2187126"/>
+            <a:ext cx="4601217" cy="3896269"/>
           </a:xfrm>
           <a:prstGeom prst="rect">
             <a:avLst/>
           </a:prstGeom>
         </p:spPr>
       </p:pic>
-      <p:sp>
-        <p:nvSpPr>
-          <p:cNvPr id="9" name="正方形/長方形 8">
-            <a:extLst>
-              <a:ext uri="{FF2B5EF4-FFF2-40B4-BE49-F238E27FC236}">
-                <a16:creationId xmlns:a16="http://schemas.microsoft.com/office/drawing/2014/main" id="{27C78F36-9B5D-451F-B336-1E230BED7BCE}"/>
-              </a:ext>
-            </a:extLst>
-          </p:cNvPr>
-          <p:cNvSpPr/>
-          <p:nvPr/>
-        </p:nvSpPr>
-        <p:spPr>
-          <a:xfrm>
-            <a:off x="694541" y="5236633"/>
-            <a:ext cx="2565126" cy="656167"/>
-          </a:xfrm>
-          <a:prstGeom prst="rect">
-            <a:avLst/>
-          </a:prstGeom>
-          <a:noFill/>
-          <a:ln w="38100">
-            <a:solidFill>
-              <a:srgbClr val="FF0000"/>
-            </a:solidFill>
-          </a:ln>
-        </p:spPr>
-        <p:style>
-          <a:lnRef idx="2">
-            <a:schemeClr val="accent1">
-              <a:shade val="50000"/>
-            </a:schemeClr>
-          </a:lnRef>
-          <a:fillRef idx="1">
-            <a:schemeClr val="accent1"/>
-          </a:fillRef>
-          <a:effectRef idx="0">
-            <a:schemeClr val="accent1"/>
-          </a:effectRef>
-          <a:fontRef idx="minor">
-            <a:schemeClr val="lt1"/>
-          </a:fontRef>
-        </p:style>
-        <p:txBody>
-          <a:bodyPr rtlCol="0" anchor="ctr"/>
-          <a:lstStyle/>
-          <a:p>
-            <a:pPr algn="ctr"/>
-            <a:endParaRPr kumimoji="1" lang="ja-JP" altLang="en-US"/>
-          </a:p>
-        </p:txBody>
-      </p:sp>
     </p:spTree>
     <p:extLst>
       <p:ext uri="{BB962C8B-B14F-4D97-AF65-F5344CB8AC3E}">
-        <p14:creationId xmlns:p14="http://schemas.microsoft.com/office/powerpoint/2010/main" val="1417763090"/>
+        <p14:creationId xmlns:p14="http://schemas.microsoft.com/office/powerpoint/2010/main" val="3664534186"/>
       </p:ext>
     </p:extLst>
   </p:cSld>
@@ -4142,7 +4008,7 @@
         <p:spPr>
           <a:xfrm>
             <a:off x="567542" y="1216429"/>
-            <a:ext cx="9060494" cy="1200329"/>
+            <a:ext cx="4493538" cy="461665"/>
           </a:xfrm>
           <a:prstGeom prst="rect">
             <a:avLst/>
@@ -4156,42 +4022,8 @@
           <a:lstStyle/>
           <a:p>
             <a:r>
-              <a:rPr lang="en-US" altLang="ja-JP" sz="2400" b="1" dirty="0">
-                <a:solidFill>
-                  <a:srgbClr val="FF0000"/>
-                </a:solidFill>
-              </a:rPr>
-              <a:t>ShaderCompiler.exe</a:t>
-            </a:r>
-            <a:r>
               <a:rPr lang="ja-JP" altLang="en-US" sz="2400" dirty="0"/>
-              <a:t>を正しく起動するにはバッチが必要です。</a:t>
-            </a:r>
-            <a:endParaRPr lang="en-US" altLang="ja-JP" sz="2400" dirty="0"/>
-          </a:p>
-          <a:p>
-            <a:r>
-              <a:rPr lang="ja-JP" altLang="en-US" sz="2400" dirty="0"/>
-              <a:t>今回はすでに用意しています。</a:t>
-            </a:r>
-            <a:endParaRPr lang="en-US" altLang="ja-JP" sz="2400" dirty="0"/>
-          </a:p>
-          <a:p>
-            <a:r>
-              <a:rPr lang="ja-JP" altLang="en-US" sz="2400" dirty="0"/>
-              <a:t>興味がある方は</a:t>
-            </a:r>
-            <a:r>
-              <a:rPr lang="en-US" altLang="ja-JP" sz="2400" b="1" dirty="0">
-                <a:solidFill>
-                  <a:srgbClr val="7030A0"/>
-                </a:solidFill>
-              </a:rPr>
-              <a:t>Visual Studio</a:t>
-            </a:r>
-            <a:r>
-              <a:rPr lang="ja-JP" altLang="en-US" sz="2400" dirty="0"/>
-              <a:t>で中身を見てください。</a:t>
+              <a:t>試しに１行書き足しましょう。</a:t>
             </a:r>
             <a:endParaRPr lang="en-US" altLang="ja-JP" sz="2400" dirty="0"/>
           </a:p>
@@ -4202,7 +4034,7 @@
           <p:cNvPr id="5" name="図 4">
             <a:extLst>
               <a:ext uri="{FF2B5EF4-FFF2-40B4-BE49-F238E27FC236}">
-                <a16:creationId xmlns:a16="http://schemas.microsoft.com/office/drawing/2014/main" id="{889D946E-9456-4600-8E64-03118F734250}"/>
+                <a16:creationId xmlns:a16="http://schemas.microsoft.com/office/drawing/2014/main" id="{3A702C0A-284E-4639-A95A-21DC4CDFF936}"/>
               </a:ext>
             </a:extLst>
           </p:cNvPr>
@@ -4219,8 +4051,8 @@
         </p:blipFill>
         <p:spPr>
           <a:xfrm>
-            <a:off x="567541" y="2556458"/>
-            <a:ext cx="2844525" cy="2074992"/>
+            <a:off x="567542" y="1817793"/>
+            <a:ext cx="7021432" cy="3101339"/>
           </a:xfrm>
           <a:prstGeom prst="rect">
             <a:avLst/>
@@ -4229,10 +4061,10 @@
       </p:pic>
       <p:sp>
         <p:nvSpPr>
-          <p:cNvPr id="8" name="正方形/長方形 7">
-            <a:extLst>
-              <a:ext uri="{FF2B5EF4-FFF2-40B4-BE49-F238E27FC236}">
-                <a16:creationId xmlns:a16="http://schemas.microsoft.com/office/drawing/2014/main" id="{2667ED39-2806-4BEC-9BF7-A6DA531CED34}"/>
+          <p:cNvPr id="7" name="正方形/長方形 6">
+            <a:extLst>
+              <a:ext uri="{FF2B5EF4-FFF2-40B4-BE49-F238E27FC236}">
+                <a16:creationId xmlns:a16="http://schemas.microsoft.com/office/drawing/2014/main" id="{FD8123A4-9EA2-4D11-9A47-3EE93E4A77A4}"/>
               </a:ext>
             </a:extLst>
           </p:cNvPr>
@@ -4241,8 +4073,8 @@
         </p:nvSpPr>
         <p:spPr>
           <a:xfrm>
-            <a:off x="572511" y="3678768"/>
-            <a:ext cx="2565126" cy="554566"/>
+            <a:off x="1159933" y="3191933"/>
+            <a:ext cx="3107267" cy="338667"/>
           </a:xfrm>
           <a:prstGeom prst="rect">
             <a:avLst/>
@@ -4279,102 +4111,10 @@
           </a:p>
         </p:txBody>
       </p:sp>
-      <p:sp>
-        <p:nvSpPr>
-          <p:cNvPr id="10" name="テキスト ボックス 9">
-            <a:extLst>
-              <a:ext uri="{FF2B5EF4-FFF2-40B4-BE49-F238E27FC236}">
-                <a16:creationId xmlns:a16="http://schemas.microsoft.com/office/drawing/2014/main" id="{6DACCAC1-3A8E-4F80-8751-20F89878C020}"/>
-              </a:ext>
-            </a:extLst>
-          </p:cNvPr>
-          <p:cNvSpPr txBox="1"/>
-          <p:nvPr/>
-        </p:nvSpPr>
-        <p:spPr>
-          <a:xfrm>
-            <a:off x="567541" y="4771150"/>
-            <a:ext cx="8162812" cy="1938992"/>
-          </a:xfrm>
-          <a:prstGeom prst="rect">
-            <a:avLst/>
-          </a:prstGeom>
-          <a:noFill/>
-        </p:spPr>
-        <p:txBody>
-          <a:bodyPr wrap="none" rtlCol="0">
-            <a:spAutoFit/>
-          </a:bodyPr>
-          <a:lstStyle/>
-          <a:p>
-            <a:r>
-              <a:rPr lang="en-US" altLang="ja-JP" sz="2400" b="1" dirty="0">
-                <a:solidFill>
-                  <a:srgbClr val="FF0000"/>
-                </a:solidFill>
-              </a:rPr>
-              <a:t>ShaderCompile.bat</a:t>
-            </a:r>
-            <a:r>
-              <a:rPr lang="ja-JP" altLang="en-US" sz="2400" dirty="0"/>
-              <a:t>をダブルクリックすると、</a:t>
-            </a:r>
-            <a:endParaRPr lang="en-US" altLang="ja-JP" sz="2400" dirty="0"/>
-          </a:p>
-          <a:p>
-            <a:r>
-              <a:rPr lang="ja-JP" altLang="en-US" sz="2400" dirty="0"/>
-              <a:t>フォルダ内の</a:t>
-            </a:r>
-            <a:r>
-              <a:rPr lang="en-US" altLang="ja-JP" sz="2400" dirty="0"/>
-              <a:t>HLSL</a:t>
-            </a:r>
-            <a:r>
-              <a:rPr lang="ja-JP" altLang="en-US" sz="2400" dirty="0"/>
-              <a:t>がコンパイルされます。</a:t>
-            </a:r>
-            <a:endParaRPr lang="en-US" altLang="ja-JP" sz="2400" dirty="0"/>
-          </a:p>
-          <a:p>
-            <a:r>
-              <a:rPr lang="ja-JP" altLang="en-US" sz="2400" dirty="0"/>
-              <a:t>エラーがあればログに出力され、</a:t>
-            </a:r>
-            <a:endParaRPr lang="en-US" altLang="ja-JP" sz="2400" dirty="0"/>
-          </a:p>
-          <a:p>
-            <a:r>
-              <a:rPr lang="ja-JP" altLang="en-US" sz="2400" dirty="0"/>
-              <a:t>エラーがなければ、「</a:t>
-            </a:r>
-            <a:r>
-              <a:rPr lang="en-US" altLang="ja-JP" sz="2400" b="1" dirty="0">
-                <a:solidFill>
-                  <a:srgbClr val="FF0000"/>
-                </a:solidFill>
-              </a:rPr>
-              <a:t>Project &gt; Data &gt; Shader</a:t>
-            </a:r>
-            <a:r>
-              <a:rPr lang="ja-JP" altLang="en-US" sz="2400" dirty="0"/>
-              <a:t>」の中に</a:t>
-            </a:r>
-            <a:endParaRPr lang="en-US" altLang="ja-JP" sz="2400" dirty="0"/>
-          </a:p>
-          <a:p>
-            <a:r>
-              <a:rPr lang="ja-JP" altLang="en-US" sz="2400" dirty="0"/>
-              <a:t>ゲームに使用するデータが出力されます。</a:t>
-            </a:r>
-            <a:endParaRPr lang="en-US" altLang="ja-JP" sz="2400" dirty="0"/>
-          </a:p>
-        </p:txBody>
-      </p:sp>
     </p:spTree>
     <p:extLst>
       <p:ext uri="{BB962C8B-B14F-4D97-AF65-F5344CB8AC3E}">
-        <p14:creationId xmlns:p14="http://schemas.microsoft.com/office/powerpoint/2010/main" val="3498208671"/>
+        <p14:creationId xmlns:p14="http://schemas.microsoft.com/office/powerpoint/2010/main" val="1141121993"/>
       </p:ext>
     </p:extLst>
   </p:cSld>
@@ -4452,7 +4192,7 @@
         <p:spPr>
           <a:xfrm>
             <a:off x="567542" y="1216429"/>
-            <a:ext cx="10625025" cy="830997"/>
+            <a:ext cx="4929555" cy="461665"/>
           </a:xfrm>
           <a:prstGeom prst="rect">
             <a:avLst/>
@@ -4467,26 +4207,15 @@
           <a:p>
             <a:r>
               <a:rPr lang="ja-JP" altLang="en-US" sz="2400" dirty="0"/>
-              <a:t>コンパイル後に、</a:t>
-            </a:r>
-            <a:endParaRPr lang="en-US" altLang="ja-JP" sz="2400" dirty="0"/>
-          </a:p>
-          <a:p>
+              <a:t>すべての頂点が</a:t>
+            </a:r>
+            <a:r>
+              <a:rPr lang="en-US" altLang="ja-JP" sz="2400" dirty="0"/>
+              <a:t>3m</a:t>
+            </a:r>
             <a:r>
               <a:rPr lang="ja-JP" altLang="en-US" sz="2400" dirty="0"/>
-              <a:t>「</a:t>
-            </a:r>
-            <a:r>
-              <a:rPr lang="en-US" altLang="ja-JP" sz="2400" b="1" dirty="0">
-                <a:solidFill>
-                  <a:srgbClr val="FF0000"/>
-                </a:solidFill>
-              </a:rPr>
-              <a:t>Project &gt; Data &gt; Shader</a:t>
-            </a:r>
-            <a:r>
-              <a:rPr lang="ja-JP" altLang="en-US" sz="2400" dirty="0"/>
-              <a:t>」に以下のファイルがあるか確認しましょう。</a:t>
+              <a:t>右にずれます。</a:t>
             </a:r>
             <a:endParaRPr lang="en-US" altLang="ja-JP" sz="2400" dirty="0"/>
           </a:p>
@@ -4497,7 +4226,7 @@
           <p:cNvPr id="3" name="図 2">
             <a:extLst>
               <a:ext uri="{FF2B5EF4-FFF2-40B4-BE49-F238E27FC236}">
-                <a16:creationId xmlns:a16="http://schemas.microsoft.com/office/drawing/2014/main" id="{436E95C8-3440-4C42-9CB0-46ACC4F5376B}"/>
+                <a16:creationId xmlns:a16="http://schemas.microsoft.com/office/drawing/2014/main" id="{623C8B96-8645-408B-869C-06D8DA17BCA9}"/>
               </a:ext>
             </a:extLst>
           </p:cNvPr>
@@ -4514,8 +4243,8 @@
         </p:blipFill>
         <p:spPr>
           <a:xfrm>
-            <a:off x="567542" y="2187126"/>
-            <a:ext cx="5047714" cy="2461074"/>
+            <a:off x="567542" y="1817793"/>
+            <a:ext cx="7790909" cy="3092873"/>
           </a:xfrm>
           <a:prstGeom prst="rect">
             <a:avLst/>
@@ -4525,7 +4254,7 @@
     </p:spTree>
     <p:extLst>
       <p:ext uri="{BB962C8B-B14F-4D97-AF65-F5344CB8AC3E}">
-        <p14:creationId xmlns:p14="http://schemas.microsoft.com/office/powerpoint/2010/main" val="2789498434"/>
+        <p14:creationId xmlns:p14="http://schemas.microsoft.com/office/powerpoint/2010/main" val="3596934220"/>
       </p:ext>
     </p:extLst>
   </p:cSld>
@@ -4603,7 +4332,7 @@
         <p:spPr>
           <a:xfrm>
             <a:off x="567542" y="1216429"/>
-            <a:ext cx="8978740" cy="1200329"/>
+            <a:ext cx="6340197" cy="461665"/>
           </a:xfrm>
           <a:prstGeom prst="rect">
             <a:avLst/>
@@ -4618,29 +4347,7 @@
           <a:p>
             <a:r>
               <a:rPr lang="ja-JP" altLang="en-US" sz="2400" dirty="0"/>
-              <a:t>今回作った</a:t>
-            </a:r>
-            <a:r>
-              <a:rPr lang="en-US" altLang="ja-JP" sz="2400" dirty="0"/>
-              <a:t>HLSL</a:t>
-            </a:r>
-            <a:r>
-              <a:rPr lang="ja-JP" altLang="en-US" sz="2400" dirty="0"/>
-              <a:t>ファイルが、最低限のプログラムになります。</a:t>
-            </a:r>
-            <a:endParaRPr lang="en-US" altLang="ja-JP" sz="2400" dirty="0"/>
-          </a:p>
-          <a:p>
-            <a:r>
-              <a:rPr lang="ja-JP" altLang="en-US" sz="2400" dirty="0"/>
-              <a:t>今後はこれから様々なプログラムを書きますので、</a:t>
-            </a:r>
-            <a:endParaRPr lang="en-US" altLang="ja-JP" sz="2400" dirty="0"/>
-          </a:p>
-          <a:p>
-            <a:r>
-              <a:rPr lang="ja-JP" altLang="en-US" sz="2400" dirty="0"/>
-              <a:t>大事に保管しておきましょう。</a:t>
+              <a:t>ピクセルシェーダも書き換えてみましょう。</a:t>
             </a:r>
             <a:endParaRPr lang="en-US" altLang="ja-JP" sz="2400" dirty="0"/>
           </a:p>
@@ -4648,10 +4355,10 @@
       </p:sp>
       <p:pic>
         <p:nvPicPr>
-          <p:cNvPr id="5" name="図 4">
-            <a:extLst>
-              <a:ext uri="{FF2B5EF4-FFF2-40B4-BE49-F238E27FC236}">
-                <a16:creationId xmlns:a16="http://schemas.microsoft.com/office/drawing/2014/main" id="{A6C5841A-D78B-4AD1-9355-2BEABBD27EE4}"/>
+          <p:cNvPr id="3" name="図 2">
+            <a:extLst>
+              <a:ext uri="{FF2B5EF4-FFF2-40B4-BE49-F238E27FC236}">
+                <a16:creationId xmlns:a16="http://schemas.microsoft.com/office/drawing/2014/main" id="{C0DDD52E-54B7-4D91-B009-8025F77B12D4}"/>
               </a:ext>
             </a:extLst>
           </p:cNvPr>
@@ -4668,72 +4375,86 @@
         </p:blipFill>
         <p:spPr>
           <a:xfrm>
-            <a:off x="567542" y="2556458"/>
-            <a:ext cx="3243094" cy="2190141"/>
+            <a:off x="567542" y="1817794"/>
+            <a:ext cx="6747658" cy="1500930"/>
           </a:xfrm>
           <a:prstGeom prst="rect">
             <a:avLst/>
           </a:prstGeom>
         </p:spPr>
       </p:pic>
-      <p:sp>
-        <p:nvSpPr>
-          <p:cNvPr id="7" name="正方形/長方形 6">
-            <a:extLst>
-              <a:ext uri="{FF2B5EF4-FFF2-40B4-BE49-F238E27FC236}">
-                <a16:creationId xmlns:a16="http://schemas.microsoft.com/office/drawing/2014/main" id="{75D601EE-2B7F-47F3-A459-ED03DD790401}"/>
-              </a:ext>
-            </a:extLst>
-          </p:cNvPr>
-          <p:cNvSpPr/>
+    </p:spTree>
+    <p:extLst>
+      <p:ext uri="{BB962C8B-B14F-4D97-AF65-F5344CB8AC3E}">
+        <p14:creationId xmlns:p14="http://schemas.microsoft.com/office/powerpoint/2010/main" val="2087194349"/>
+      </p:ext>
+    </p:extLst>
+  </p:cSld>
+  <p:clrMapOvr>
+    <a:masterClrMapping/>
+  </p:clrMapOvr>
+</p:sld>
+</file>
+
+<file path=ppt/slides/slide14.xml><?xml version="1.0" encoding="utf-8"?>
+<p:sld xmlns:a="http://schemas.openxmlformats.org/drawingml/2006/main" xmlns:r="http://schemas.openxmlformats.org/officeDocument/2006/relationships" xmlns:p="http://schemas.openxmlformats.org/presentationml/2006/main">
+  <p:cSld>
+    <p:spTree>
+      <p:nvGrpSpPr>
+        <p:cNvPr id="1" name=""/>
+        <p:cNvGrpSpPr/>
+        <p:nvPr/>
+      </p:nvGrpSpPr>
+      <p:grpSpPr>
+        <a:xfrm>
+          <a:off x="0" y="0"/>
+          <a:ext cx="0" cy="0"/>
+          <a:chOff x="0" y="0"/>
+          <a:chExt cx="0" cy="0"/>
+        </a:xfrm>
+      </p:grpSpPr>
+      <p:sp>
+        <p:nvSpPr>
+          <p:cNvPr id="4" name="テキスト ボックス 3">
+            <a:extLst>
+              <a:ext uri="{FF2B5EF4-FFF2-40B4-BE49-F238E27FC236}">
+                <a16:creationId xmlns:a16="http://schemas.microsoft.com/office/drawing/2014/main" id="{5A13BF46-B8C5-48AA-8308-C9ECFF431A18}"/>
+              </a:ext>
+            </a:extLst>
+          </p:cNvPr>
+          <p:cNvSpPr txBox="1"/>
           <p:nvPr/>
         </p:nvSpPr>
         <p:spPr>
           <a:xfrm>
-            <a:off x="567542" y="2850066"/>
-            <a:ext cx="3243094" cy="948267"/>
+            <a:off x="567542" y="491954"/>
+            <a:ext cx="1287532" cy="584775"/>
           </a:xfrm>
           <a:prstGeom prst="rect">
             <a:avLst/>
           </a:prstGeom>
           <a:noFill/>
-          <a:ln w="38100">
-            <a:solidFill>
-              <a:srgbClr val="FF0000"/>
-            </a:solidFill>
-          </a:ln>
-        </p:spPr>
-        <p:style>
-          <a:lnRef idx="2">
-            <a:schemeClr val="accent1">
-              <a:shade val="50000"/>
-            </a:schemeClr>
-          </a:lnRef>
-          <a:fillRef idx="1">
-            <a:schemeClr val="accent1"/>
-          </a:fillRef>
-          <a:effectRef idx="0">
-            <a:schemeClr val="accent1"/>
-          </a:effectRef>
-          <a:fontRef idx="minor">
-            <a:schemeClr val="lt1"/>
-          </a:fontRef>
-        </p:style>
-        <p:txBody>
-          <a:bodyPr rtlCol="0" anchor="ctr"/>
-          <a:lstStyle/>
-          <a:p>
-            <a:pPr algn="ctr"/>
-            <a:endParaRPr kumimoji="1" lang="ja-JP" altLang="en-US"/>
-          </a:p>
-        </p:txBody>
-      </p:sp>
-      <p:sp>
-        <p:nvSpPr>
-          <p:cNvPr id="8" name="テキスト ボックス 7">
-            <a:extLst>
-              <a:ext uri="{FF2B5EF4-FFF2-40B4-BE49-F238E27FC236}">
-                <a16:creationId xmlns:a16="http://schemas.microsoft.com/office/drawing/2014/main" id="{8FA4DA02-31D3-45B6-A47C-E21E0E33C2AA}"/>
+        </p:spPr>
+        <p:txBody>
+          <a:bodyPr wrap="none" rtlCol="0">
+            <a:spAutoFit/>
+          </a:bodyPr>
+          <a:lstStyle/>
+          <a:p>
+            <a:r>
+              <a:rPr lang="en-US" altLang="ja-JP" sz="3200" b="1" u="sng" dirty="0"/>
+              <a:t>HLSL</a:t>
+            </a:r>
+            <a:endParaRPr kumimoji="1" lang="en-US" altLang="ja-JP" sz="3200" b="1" u="sng" dirty="0"/>
+          </a:p>
+        </p:txBody>
+      </p:sp>
+      <p:sp>
+        <p:nvSpPr>
+          <p:cNvPr id="6" name="テキスト ボックス 5">
+            <a:extLst>
+              <a:ext uri="{FF2B5EF4-FFF2-40B4-BE49-F238E27FC236}">
+                <a16:creationId xmlns:a16="http://schemas.microsoft.com/office/drawing/2014/main" id="{55830AD6-028B-4C4E-80BF-B70DFC1C3A46}"/>
               </a:ext>
             </a:extLst>
           </p:cNvPr>
@@ -4742,8 +4463,8 @@
         </p:nvSpPr>
         <p:spPr>
           <a:xfrm>
-            <a:off x="567542" y="5031265"/>
-            <a:ext cx="7263527" cy="461665"/>
+            <a:off x="567542" y="1216429"/>
+            <a:ext cx="3877985" cy="461665"/>
           </a:xfrm>
           <a:prstGeom prst="rect">
             <a:avLst/>
@@ -4758,16 +4479,185 @@
           <a:p>
             <a:r>
               <a:rPr lang="ja-JP" altLang="en-US" sz="2400" dirty="0"/>
-              <a:t>これらのコピペから新しいシェーダーを作ります。</a:t>
+              <a:t>必ず赤色で表示されます。</a:t>
             </a:r>
             <a:endParaRPr lang="en-US" altLang="ja-JP" sz="2400" dirty="0"/>
           </a:p>
         </p:txBody>
       </p:sp>
+      <p:pic>
+        <p:nvPicPr>
+          <p:cNvPr id="9" name="図 8">
+            <a:extLst>
+              <a:ext uri="{FF2B5EF4-FFF2-40B4-BE49-F238E27FC236}">
+                <a16:creationId xmlns:a16="http://schemas.microsoft.com/office/drawing/2014/main" id="{6BC931A0-CBA3-4B76-B940-10FBF44CE8F0}"/>
+              </a:ext>
+            </a:extLst>
+          </p:cNvPr>
+          <p:cNvPicPr>
+            <a:picLocks noChangeAspect="1"/>
+          </p:cNvPicPr>
+          <p:nvPr/>
+        </p:nvPicPr>
+        <p:blipFill>
+          <a:blip r:embed="rId2"/>
+          <a:stretch>
+            <a:fillRect/>
+          </a:stretch>
+        </p:blipFill>
+        <p:spPr>
+          <a:xfrm>
+            <a:off x="567542" y="1817793"/>
+            <a:ext cx="5060423" cy="3914139"/>
+          </a:xfrm>
+          <a:prstGeom prst="rect">
+            <a:avLst/>
+          </a:prstGeom>
+        </p:spPr>
+      </p:pic>
     </p:spTree>
     <p:extLst>
       <p:ext uri="{BB962C8B-B14F-4D97-AF65-F5344CB8AC3E}">
-        <p14:creationId xmlns:p14="http://schemas.microsoft.com/office/powerpoint/2010/main" val="2047688870"/>
+        <p14:creationId xmlns:p14="http://schemas.microsoft.com/office/powerpoint/2010/main" val="4098184654"/>
+      </p:ext>
+    </p:extLst>
+  </p:cSld>
+  <p:clrMapOvr>
+    <a:masterClrMapping/>
+  </p:clrMapOvr>
+</p:sld>
+</file>
+
+<file path=ppt/slides/slide15.xml><?xml version="1.0" encoding="utf-8"?>
+<p:sld xmlns:a="http://schemas.openxmlformats.org/drawingml/2006/main" xmlns:r="http://schemas.openxmlformats.org/officeDocument/2006/relationships" xmlns:p="http://schemas.openxmlformats.org/presentationml/2006/main">
+  <p:cSld>
+    <p:spTree>
+      <p:nvGrpSpPr>
+        <p:cNvPr id="1" name=""/>
+        <p:cNvGrpSpPr/>
+        <p:nvPr/>
+      </p:nvGrpSpPr>
+      <p:grpSpPr>
+        <a:xfrm>
+          <a:off x="0" y="0"/>
+          <a:ext cx="0" cy="0"/>
+          <a:chOff x="0" y="0"/>
+          <a:chExt cx="0" cy="0"/>
+        </a:xfrm>
+      </p:grpSpPr>
+      <p:sp>
+        <p:nvSpPr>
+          <p:cNvPr id="4" name="テキスト ボックス 3">
+            <a:extLst>
+              <a:ext uri="{FF2B5EF4-FFF2-40B4-BE49-F238E27FC236}">
+                <a16:creationId xmlns:a16="http://schemas.microsoft.com/office/drawing/2014/main" id="{5A13BF46-B8C5-48AA-8308-C9ECFF431A18}"/>
+              </a:ext>
+            </a:extLst>
+          </p:cNvPr>
+          <p:cNvSpPr txBox="1"/>
+          <p:nvPr/>
+        </p:nvSpPr>
+        <p:spPr>
+          <a:xfrm>
+            <a:off x="567542" y="491954"/>
+            <a:ext cx="1287532" cy="584775"/>
+          </a:xfrm>
+          <a:prstGeom prst="rect">
+            <a:avLst/>
+          </a:prstGeom>
+          <a:noFill/>
+        </p:spPr>
+        <p:txBody>
+          <a:bodyPr wrap="none" rtlCol="0">
+            <a:spAutoFit/>
+          </a:bodyPr>
+          <a:lstStyle/>
+          <a:p>
+            <a:r>
+              <a:rPr lang="en-US" altLang="ja-JP" sz="3200" b="1" u="sng" dirty="0"/>
+              <a:t>HLSL</a:t>
+            </a:r>
+            <a:endParaRPr kumimoji="1" lang="en-US" altLang="ja-JP" sz="3200" b="1" u="sng" dirty="0"/>
+          </a:p>
+        </p:txBody>
+      </p:sp>
+      <p:sp>
+        <p:nvSpPr>
+          <p:cNvPr id="6" name="テキスト ボックス 5">
+            <a:extLst>
+              <a:ext uri="{FF2B5EF4-FFF2-40B4-BE49-F238E27FC236}">
+                <a16:creationId xmlns:a16="http://schemas.microsoft.com/office/drawing/2014/main" id="{55830AD6-028B-4C4E-80BF-B70DFC1C3A46}"/>
+              </a:ext>
+            </a:extLst>
+          </p:cNvPr>
+          <p:cNvSpPr txBox="1"/>
+          <p:nvPr/>
+        </p:nvSpPr>
+        <p:spPr>
+          <a:xfrm>
+            <a:off x="567542" y="1216429"/>
+            <a:ext cx="10033516" cy="1569660"/>
+          </a:xfrm>
+          <a:prstGeom prst="rect">
+            <a:avLst/>
+          </a:prstGeom>
+          <a:noFill/>
+        </p:spPr>
+        <p:txBody>
+          <a:bodyPr wrap="none" rtlCol="0">
+            <a:spAutoFit/>
+          </a:bodyPr>
+          <a:lstStyle/>
+          <a:p>
+            <a:r>
+              <a:rPr lang="ja-JP" altLang="en-US" sz="2400" dirty="0"/>
+              <a:t>基本的に、</a:t>
+            </a:r>
+            <a:r>
+              <a:rPr lang="ja-JP" altLang="en-US" sz="2400" b="1" dirty="0">
+                <a:solidFill>
+                  <a:srgbClr val="FF0000"/>
+                </a:solidFill>
+              </a:rPr>
+              <a:t>頂点の位置をいじりたい場合は頂点シェーダー</a:t>
+            </a:r>
+            <a:r>
+              <a:rPr lang="ja-JP" altLang="en-US" sz="2400" dirty="0"/>
+              <a:t>、</a:t>
+            </a:r>
+            <a:endParaRPr lang="en-US" altLang="ja-JP" sz="2400" dirty="0"/>
+          </a:p>
+          <a:p>
+            <a:r>
+              <a:rPr lang="ja-JP" altLang="en-US" sz="2400" b="1" dirty="0">
+                <a:solidFill>
+                  <a:srgbClr val="FF0000"/>
+                </a:solidFill>
+              </a:rPr>
+              <a:t>ピクセル単位の色をいじりたい場合はピクセルシェーダー</a:t>
+            </a:r>
+            <a:r>
+              <a:rPr lang="ja-JP" altLang="en-US" sz="2400" dirty="0"/>
+              <a:t>を使います。</a:t>
+            </a:r>
+            <a:endParaRPr lang="en-US" altLang="ja-JP" sz="2400" dirty="0"/>
+          </a:p>
+          <a:p>
+            <a:endParaRPr lang="en-US" altLang="ja-JP" sz="2400" dirty="0"/>
+          </a:p>
+          <a:p>
+            <a:r>
+              <a:rPr lang="ja-JP" altLang="en-US" sz="2400" dirty="0"/>
+              <a:t>使いこなすとゲームの見映えを格段に上げることができます。</a:t>
+            </a:r>
+            <a:endParaRPr lang="en-US" altLang="ja-JP" sz="2400" dirty="0"/>
+          </a:p>
+        </p:txBody>
+      </p:sp>
+    </p:spTree>
+    <p:extLst>
+      <p:ext uri="{BB962C8B-B14F-4D97-AF65-F5344CB8AC3E}">
+        <p14:creationId xmlns:p14="http://schemas.microsoft.com/office/powerpoint/2010/main" val="2314407811"/>
       </p:ext>
     </p:extLst>
   </p:cSld>
@@ -4845,7 +4735,7 @@
         <p:spPr>
           <a:xfrm>
             <a:off x="567542" y="1216429"/>
-            <a:ext cx="10445488" cy="830997"/>
+            <a:ext cx="6673622" cy="830997"/>
           </a:xfrm>
           <a:prstGeom prst="rect">
             <a:avLst/>
@@ -4859,150 +4749,58 @@
           <a:lstStyle/>
           <a:p>
             <a:r>
+              <a:rPr lang="en-US" altLang="ja-JP" sz="2400" dirty="0"/>
+              <a:t>Assets</a:t>
+            </a:r>
+            <a:r>
               <a:rPr lang="ja-JP" altLang="en-US" sz="2400" dirty="0"/>
-              <a:t>まずは最低限のシェーダーファイルを作ります。</a:t>
+              <a:t>フォルダ内に</a:t>
+            </a:r>
+            <a:r>
+              <a:rPr lang="en-US" altLang="ja-JP" sz="2400" b="1" dirty="0">
+                <a:solidFill>
+                  <a:srgbClr val="FF0000"/>
+                </a:solidFill>
+              </a:rPr>
+              <a:t>Shaders</a:t>
+            </a:r>
+            <a:r>
+              <a:rPr lang="ja-JP" altLang="en-US" sz="2400" b="1" dirty="0">
+                <a:solidFill>
+                  <a:srgbClr val="FF0000"/>
+                </a:solidFill>
+              </a:rPr>
+              <a:t>フォルダ</a:t>
+            </a:r>
+            <a:r>
+              <a:rPr lang="ja-JP" altLang="en-US" sz="2400" dirty="0"/>
+              <a:t>を作り、</a:t>
             </a:r>
             <a:endParaRPr lang="en-US" altLang="ja-JP" sz="2400" dirty="0"/>
           </a:p>
           <a:p>
-            <a:r>
-              <a:rPr kumimoji="1" lang="ja-JP" altLang="en-US" sz="2400" dirty="0"/>
-              <a:t>「</a:t>
-            </a:r>
             <a:r>
               <a:rPr kumimoji="1" lang="en-US" altLang="ja-JP" sz="2400" b="1" dirty="0">
                 <a:solidFill>
                   <a:srgbClr val="FF0000"/>
                 </a:solidFill>
               </a:rPr>
-              <a:t>Resource &gt; Shader</a:t>
+              <a:t>Unlit Shader</a:t>
             </a:r>
             <a:r>
               <a:rPr kumimoji="1" lang="ja-JP" altLang="en-US" sz="2400" dirty="0"/>
-              <a:t>」の中に以下の２つのファイルを追加しましょう。</a:t>
+              <a:t>を追加しましょう。</a:t>
             </a:r>
             <a:endParaRPr kumimoji="1" lang="en-US" altLang="ja-JP" sz="2400" dirty="0"/>
-          </a:p>
-        </p:txBody>
-      </p:sp>
-      <p:sp>
-        <p:nvSpPr>
-          <p:cNvPr id="7" name="テキスト ボックス 6">
-            <a:extLst>
-              <a:ext uri="{FF2B5EF4-FFF2-40B4-BE49-F238E27FC236}">
-                <a16:creationId xmlns:a16="http://schemas.microsoft.com/office/drawing/2014/main" id="{FF8229FD-450C-4250-BA8D-9B7810C750C0}"/>
-              </a:ext>
-            </a:extLst>
-          </p:cNvPr>
-          <p:cNvSpPr txBox="1"/>
-          <p:nvPr/>
-        </p:nvSpPr>
-        <p:spPr>
-          <a:xfrm>
-            <a:off x="567541" y="4516965"/>
-            <a:ext cx="8667757" cy="1938992"/>
-          </a:xfrm>
-          <a:prstGeom prst="rect">
-            <a:avLst/>
-          </a:prstGeom>
-          <a:noFill/>
-        </p:spPr>
-        <p:txBody>
-          <a:bodyPr wrap="none" rtlCol="0">
-            <a:spAutoFit/>
-          </a:bodyPr>
-          <a:lstStyle/>
-          <a:p>
-            <a:r>
-              <a:rPr kumimoji="1" lang="en-US" altLang="ja-JP" sz="2400" dirty="0"/>
-              <a:t>VS</a:t>
-            </a:r>
-            <a:r>
-              <a:rPr kumimoji="1" lang="ja-JP" altLang="en-US" sz="2400" dirty="0"/>
-              <a:t>は</a:t>
-            </a:r>
-            <a:r>
-              <a:rPr kumimoji="1" lang="en-US" altLang="ja-JP" sz="2400" dirty="0"/>
-              <a:t>Vertex Shader</a:t>
-            </a:r>
-            <a:r>
-              <a:rPr kumimoji="1" lang="ja-JP" altLang="en-US" sz="2400" dirty="0"/>
-              <a:t>（頂点シェーダー）の略</a:t>
-            </a:r>
-            <a:endParaRPr kumimoji="1" lang="en-US" altLang="ja-JP" sz="2400" dirty="0"/>
-          </a:p>
-          <a:p>
-            <a:r>
-              <a:rPr lang="en-US" altLang="ja-JP" sz="2400" dirty="0"/>
-              <a:t>PS</a:t>
-            </a:r>
-            <a:r>
-              <a:rPr lang="ja-JP" altLang="en-US" sz="2400" dirty="0"/>
-              <a:t>は</a:t>
-            </a:r>
-            <a:r>
-              <a:rPr lang="en-US" altLang="ja-JP" sz="2400" dirty="0"/>
-              <a:t>Pixel Shader</a:t>
-            </a:r>
-            <a:r>
-              <a:rPr lang="ja-JP" altLang="en-US" sz="2400" dirty="0"/>
-              <a:t>（ピクセルシェーダー）の略</a:t>
-            </a:r>
-            <a:endParaRPr lang="en-US" altLang="ja-JP" sz="2400" dirty="0"/>
-          </a:p>
-          <a:p>
-            <a:endParaRPr kumimoji="1" lang="en-US" altLang="ja-JP" sz="2400" dirty="0"/>
-          </a:p>
-          <a:p>
-            <a:r>
-              <a:rPr lang="en-US" altLang="ja-JP" sz="2400" dirty="0"/>
-              <a:t>HLSL</a:t>
-            </a:r>
-            <a:r>
-              <a:rPr lang="ja-JP" altLang="en-US" sz="2400" dirty="0"/>
-              <a:t>自体は</a:t>
-            </a:r>
-            <a:endParaRPr lang="en-US" altLang="ja-JP" sz="2400" dirty="0"/>
-          </a:p>
-          <a:p>
-            <a:r>
-              <a:rPr lang="ja-JP" altLang="en-US" sz="2400" b="1" dirty="0">
-                <a:solidFill>
-                  <a:srgbClr val="FF0000"/>
-                </a:solidFill>
-              </a:rPr>
-              <a:t>ゲームでロードしないので</a:t>
-            </a:r>
-            <a:r>
-              <a:rPr lang="en-US" altLang="ja-JP" sz="2400" b="1" dirty="0">
-                <a:solidFill>
-                  <a:srgbClr val="FF0000"/>
-                </a:solidFill>
-              </a:rPr>
-              <a:t>Resource</a:t>
-            </a:r>
-            <a:r>
-              <a:rPr lang="ja-JP" altLang="en-US" sz="2400" b="1" dirty="0">
-                <a:solidFill>
-                  <a:srgbClr val="FF0000"/>
-                </a:solidFill>
-              </a:rPr>
-              <a:t>ファイルに入れてます。</a:t>
-            </a:r>
-            <a:endParaRPr kumimoji="1" lang="en-US" altLang="ja-JP" sz="2400" b="1" dirty="0">
-              <a:solidFill>
-                <a:srgbClr val="FF0000"/>
-              </a:solidFill>
-            </a:endParaRPr>
           </a:p>
         </p:txBody>
       </p:sp>
       <p:pic>
         <p:nvPicPr>
-          <p:cNvPr id="11" name="図 10">
-            <a:extLst>
-              <a:ext uri="{FF2B5EF4-FFF2-40B4-BE49-F238E27FC236}">
-                <a16:creationId xmlns:a16="http://schemas.microsoft.com/office/drawing/2014/main" id="{5FF8AE23-8E4C-459F-BE42-59391E05DB8F}"/>
+          <p:cNvPr id="3" name="図 2">
+            <a:extLst>
+              <a:ext uri="{FF2B5EF4-FFF2-40B4-BE49-F238E27FC236}">
+                <a16:creationId xmlns:a16="http://schemas.microsoft.com/office/drawing/2014/main" id="{31B373FC-C28A-4646-BB8E-1E5FEC0CD19D}"/>
               </a:ext>
             </a:extLst>
           </p:cNvPr>
@@ -5019,8 +4817,8 @@
         </p:blipFill>
         <p:spPr>
           <a:xfrm>
-            <a:off x="567541" y="2187125"/>
-            <a:ext cx="3243094" cy="2190141"/>
+            <a:off x="567542" y="2187126"/>
+            <a:ext cx="7325747" cy="4220164"/>
           </a:xfrm>
           <a:prstGeom prst="rect">
             <a:avLst/>
@@ -5029,10 +4827,10 @@
       </p:pic>
       <p:sp>
         <p:nvSpPr>
-          <p:cNvPr id="12" name="正方形/長方形 11">
-            <a:extLst>
-              <a:ext uri="{FF2B5EF4-FFF2-40B4-BE49-F238E27FC236}">
-                <a16:creationId xmlns:a16="http://schemas.microsoft.com/office/drawing/2014/main" id="{D342D200-B9FC-445C-A66D-86AB70829889}"/>
+          <p:cNvPr id="7" name="矢印: 右 6">
+            <a:extLst>
+              <a:ext uri="{FF2B5EF4-FFF2-40B4-BE49-F238E27FC236}">
+                <a16:creationId xmlns:a16="http://schemas.microsoft.com/office/drawing/2014/main" id="{FCCE26C5-47F6-451C-9B4B-03B2F0B67FFB}"/>
               </a:ext>
             </a:extLst>
           </p:cNvPr>
@@ -5040,17 +4838,19 @@
           <p:nvPr/>
         </p:nvSpPr>
         <p:spPr>
-          <a:xfrm>
-            <a:off x="567541" y="2480733"/>
-            <a:ext cx="3243094" cy="948267"/>
-          </a:xfrm>
-          <a:prstGeom prst="rect">
+          <a:xfrm rot="13384766">
+            <a:off x="6440170" y="5039525"/>
+            <a:ext cx="495336" cy="321733"/>
+          </a:xfrm>
+          <a:prstGeom prst="rightArrow">
             <a:avLst/>
           </a:prstGeom>
-          <a:noFill/>
-          <a:ln w="38100">
+          <a:solidFill>
+            <a:srgbClr val="FF0000"/>
+          </a:solidFill>
+          <a:ln>
             <a:solidFill>
-              <a:srgbClr val="FF0000"/>
+              <a:schemeClr val="tx1"/>
             </a:solidFill>
           </a:ln>
         </p:spPr>
@@ -5082,7 +4882,7 @@
     </p:spTree>
     <p:extLst>
       <p:ext uri="{BB962C8B-B14F-4D97-AF65-F5344CB8AC3E}">
-        <p14:creationId xmlns:p14="http://schemas.microsoft.com/office/powerpoint/2010/main" val="4185397762"/>
+        <p14:creationId xmlns:p14="http://schemas.microsoft.com/office/powerpoint/2010/main" val="1580432064"/>
       </p:ext>
     </p:extLst>
   </p:cSld>
@@ -5160,7 +4960,7 @@
         <p:spPr>
           <a:xfrm>
             <a:off x="567542" y="1216429"/>
-            <a:ext cx="8021748" cy="461665"/>
+            <a:ext cx="7879080" cy="830997"/>
           </a:xfrm>
           <a:prstGeom prst="rect">
             <a:avLst/>
@@ -5174,16 +4974,15 @@
           <a:lstStyle/>
           <a:p>
             <a:r>
-              <a:rPr kumimoji="1" lang="en-US" altLang="ja-JP" sz="2400" b="1" dirty="0" err="1">
-                <a:solidFill>
-                  <a:srgbClr val="FF0000"/>
-                </a:solidFill>
-              </a:rPr>
-              <a:t>NormalMesh_NoLight_VS.hlsl</a:t>
-            </a:r>
-            <a:r>
               <a:rPr kumimoji="1" lang="ja-JP" altLang="en-US" sz="2400" dirty="0"/>
-              <a:t>から書きます（その１）</a:t>
+              <a:t>最低限モデルが表示されるシェーダーが作成されます。</a:t>
+            </a:r>
+            <a:endParaRPr kumimoji="1" lang="en-US" altLang="ja-JP" sz="2400" dirty="0"/>
+          </a:p>
+          <a:p>
+            <a:r>
+              <a:rPr kumimoji="1" lang="ja-JP" altLang="en-US" sz="2400" dirty="0"/>
+              <a:t>まずは基本的なものだけ紹介します。</a:t>
             </a:r>
             <a:endParaRPr kumimoji="1" lang="en-US" altLang="ja-JP" sz="2400" dirty="0"/>
           </a:p>
@@ -5191,10 +4990,10 @@
       </p:sp>
       <p:pic>
         <p:nvPicPr>
-          <p:cNvPr id="3" name="図 2">
-            <a:extLst>
-              <a:ext uri="{FF2B5EF4-FFF2-40B4-BE49-F238E27FC236}">
-                <a16:creationId xmlns:a16="http://schemas.microsoft.com/office/drawing/2014/main" id="{B5BEAE1E-A2B2-495B-9BDF-F250E2A30C6B}"/>
+          <p:cNvPr id="8" name="図 7">
+            <a:extLst>
+              <a:ext uri="{FF2B5EF4-FFF2-40B4-BE49-F238E27FC236}">
+                <a16:creationId xmlns:a16="http://schemas.microsoft.com/office/drawing/2014/main" id="{9A7AAE2D-AD08-4053-8200-07E0CA4B069C}"/>
               </a:ext>
             </a:extLst>
           </p:cNvPr>
@@ -5211,8 +5010,8 @@
         </p:blipFill>
         <p:spPr>
           <a:xfrm>
-            <a:off x="567542" y="1817794"/>
-            <a:ext cx="8315201" cy="4705763"/>
+            <a:off x="567542" y="2187126"/>
+            <a:ext cx="8178525" cy="4395957"/>
           </a:xfrm>
           <a:prstGeom prst="rect">
             <a:avLst/>
@@ -5222,7 +5021,7 @@
     </p:spTree>
     <p:extLst>
       <p:ext uri="{BB962C8B-B14F-4D97-AF65-F5344CB8AC3E}">
-        <p14:creationId xmlns:p14="http://schemas.microsoft.com/office/powerpoint/2010/main" val="2865256837"/>
+        <p14:creationId xmlns:p14="http://schemas.microsoft.com/office/powerpoint/2010/main" val="456089649"/>
       </p:ext>
     </p:extLst>
   </p:cSld>
@@ -5300,7 +5099,7 @@
         <p:spPr>
           <a:xfrm>
             <a:off x="567542" y="1216429"/>
-            <a:ext cx="8021748" cy="461665"/>
+            <a:ext cx="9655207" cy="461665"/>
           </a:xfrm>
           <a:prstGeom prst="rect">
             <a:avLst/>
@@ -5314,16 +5113,28 @@
           <a:lstStyle/>
           <a:p>
             <a:r>
-              <a:rPr kumimoji="1" lang="en-US" altLang="ja-JP" sz="2400" b="1" dirty="0" err="1">
+              <a:rPr kumimoji="1" lang="en-US" altLang="ja-JP" sz="2400" b="1" dirty="0">
+                <a:solidFill>
+                  <a:srgbClr val="00B050"/>
+                </a:solidFill>
+              </a:rPr>
+              <a:t>Properties</a:t>
+            </a:r>
+            <a:r>
+              <a:rPr kumimoji="1" lang="ja-JP" altLang="en-US" sz="2400" dirty="0"/>
+              <a:t>には</a:t>
+            </a:r>
+            <a:r>
+              <a:rPr kumimoji="1" lang="ja-JP" altLang="en-US" sz="2400" b="1" dirty="0">
                 <a:solidFill>
                   <a:srgbClr val="FF0000"/>
                 </a:solidFill>
               </a:rPr>
-              <a:t>NormalMesh_NoLight_VS.hlsl</a:t>
+              <a:t>インスペクターで設定したいパラメータ</a:t>
             </a:r>
             <a:r>
               <a:rPr kumimoji="1" lang="ja-JP" altLang="en-US" sz="2400" dirty="0"/>
-              <a:t>から書きます（その２）</a:t>
+              <a:t>を書きます。</a:t>
             </a:r>
             <a:endParaRPr kumimoji="1" lang="en-US" altLang="ja-JP" sz="2400" dirty="0"/>
           </a:p>
@@ -5331,10 +5142,10 @@
       </p:sp>
       <p:pic>
         <p:nvPicPr>
-          <p:cNvPr id="5" name="図 4">
-            <a:extLst>
-              <a:ext uri="{FF2B5EF4-FFF2-40B4-BE49-F238E27FC236}">
-                <a16:creationId xmlns:a16="http://schemas.microsoft.com/office/drawing/2014/main" id="{AA1DD721-154E-4466-9362-F6AECE1148A3}"/>
+          <p:cNvPr id="3" name="図 2">
+            <a:extLst>
+              <a:ext uri="{FF2B5EF4-FFF2-40B4-BE49-F238E27FC236}">
+                <a16:creationId xmlns:a16="http://schemas.microsoft.com/office/drawing/2014/main" id="{6222B89A-E392-45CD-8729-53DBEDE7A0AE}"/>
               </a:ext>
             </a:extLst>
           </p:cNvPr>
@@ -5351,18 +5162,102 @@
         </p:blipFill>
         <p:spPr>
           <a:xfrm>
-            <a:off x="567542" y="1817795"/>
-            <a:ext cx="11284824" cy="3571714"/>
+            <a:off x="567542" y="1817794"/>
+            <a:ext cx="4820323" cy="1057423"/>
           </a:xfrm>
           <a:prstGeom prst="rect">
             <a:avLst/>
           </a:prstGeom>
         </p:spPr>
       </p:pic>
+      <p:pic>
+        <p:nvPicPr>
+          <p:cNvPr id="7" name="図 6">
+            <a:extLst>
+              <a:ext uri="{FF2B5EF4-FFF2-40B4-BE49-F238E27FC236}">
+                <a16:creationId xmlns:a16="http://schemas.microsoft.com/office/drawing/2014/main" id="{3D44D472-437D-4CB4-AE93-28849B47FDF8}"/>
+              </a:ext>
+            </a:extLst>
+          </p:cNvPr>
+          <p:cNvPicPr>
+            <a:picLocks noChangeAspect="1"/>
+          </p:cNvPicPr>
+          <p:nvPr/>
+        </p:nvPicPr>
+        <p:blipFill>
+          <a:blip r:embed="rId3"/>
+          <a:stretch>
+            <a:fillRect/>
+          </a:stretch>
+        </p:blipFill>
+        <p:spPr>
+          <a:xfrm>
+            <a:off x="567542" y="3819250"/>
+            <a:ext cx="5988011" cy="2124350"/>
+          </a:xfrm>
+          <a:prstGeom prst="rect">
+            <a:avLst/>
+          </a:prstGeom>
+        </p:spPr>
+      </p:pic>
+      <p:sp>
+        <p:nvSpPr>
+          <p:cNvPr id="9" name="矢印: 右 8">
+            <a:extLst>
+              <a:ext uri="{FF2B5EF4-FFF2-40B4-BE49-F238E27FC236}">
+                <a16:creationId xmlns:a16="http://schemas.microsoft.com/office/drawing/2014/main" id="{8E030134-3DF8-40F4-9D0D-57A635E780D7}"/>
+              </a:ext>
+            </a:extLst>
+          </p:cNvPr>
+          <p:cNvSpPr/>
+          <p:nvPr/>
+        </p:nvSpPr>
+        <p:spPr>
+          <a:xfrm rot="5400000">
+            <a:off x="2730034" y="3268134"/>
+            <a:ext cx="495336" cy="321733"/>
+          </a:xfrm>
+          <a:prstGeom prst="rightArrow">
+            <a:avLst/>
+          </a:prstGeom>
+          <a:solidFill>
+            <a:srgbClr val="FF0000"/>
+          </a:solidFill>
+          <a:ln>
+            <a:solidFill>
+              <a:schemeClr val="tx1"/>
+            </a:solidFill>
+          </a:ln>
+        </p:spPr>
+        <p:style>
+          <a:lnRef idx="2">
+            <a:schemeClr val="accent1">
+              <a:shade val="50000"/>
+            </a:schemeClr>
+          </a:lnRef>
+          <a:fillRef idx="1">
+            <a:schemeClr val="accent1"/>
+          </a:fillRef>
+          <a:effectRef idx="0">
+            <a:schemeClr val="accent1"/>
+          </a:effectRef>
+          <a:fontRef idx="minor">
+            <a:schemeClr val="lt1"/>
+          </a:fontRef>
+        </p:style>
+        <p:txBody>
+          <a:bodyPr rtlCol="0" anchor="ctr"/>
+          <a:lstStyle/>
+          <a:p>
+            <a:pPr algn="ctr"/>
+            <a:endParaRPr kumimoji="1" lang="ja-JP" altLang="en-US"/>
+          </a:p>
+        </p:txBody>
+      </p:sp>
     </p:spTree>
     <p:extLst>
       <p:ext uri="{BB962C8B-B14F-4D97-AF65-F5344CB8AC3E}">
-        <p14:creationId xmlns:p14="http://schemas.microsoft.com/office/powerpoint/2010/main" val="2827902468"/>
+        <p14:creationId xmlns:p14="http://schemas.microsoft.com/office/powerpoint/2010/main" val="27880476"/>
       </p:ext>
     </p:extLst>
   </p:cSld>
@@ -5440,7 +5335,7 @@
         <p:spPr>
           <a:xfrm>
             <a:off x="567542" y="1216429"/>
-            <a:ext cx="8021748" cy="461665"/>
+            <a:ext cx="7879080" cy="1200329"/>
           </a:xfrm>
           <a:prstGeom prst="rect">
             <a:avLst/>
@@ -5454,16 +5349,42 @@
           <a:lstStyle/>
           <a:p>
             <a:r>
-              <a:rPr kumimoji="1" lang="en-US" altLang="ja-JP" sz="2400" b="1" dirty="0" err="1">
+              <a:rPr kumimoji="1" lang="ja-JP" altLang="en-US" sz="2400" dirty="0"/>
+              <a:t>処理に必要なデータは構造体にまとめます。</a:t>
+            </a:r>
+            <a:endParaRPr kumimoji="1" lang="en-US" altLang="ja-JP" sz="2400" dirty="0"/>
+          </a:p>
+          <a:p>
+            <a:r>
+              <a:rPr lang="ja-JP" altLang="en-US" sz="2400" dirty="0"/>
+              <a:t>また構造体には</a:t>
+            </a:r>
+            <a:r>
+              <a:rPr lang="ja-JP" altLang="en-US" sz="2400" b="1" dirty="0">
                 <a:solidFill>
                   <a:srgbClr val="FF0000"/>
                 </a:solidFill>
               </a:rPr>
-              <a:t>NormalMesh_NoLight_VS.hlsl</a:t>
+              <a:t>セマンティクス</a:t>
+            </a:r>
+            <a:r>
+              <a:rPr lang="ja-JP" altLang="en-US" sz="2400" dirty="0"/>
+              <a:t>を付与することでき、</a:t>
+            </a:r>
+            <a:endParaRPr lang="en-US" altLang="ja-JP" sz="2400" dirty="0"/>
+          </a:p>
+          <a:p>
+            <a:r>
+              <a:rPr kumimoji="1" lang="ja-JP" altLang="en-US" sz="2400" b="1" dirty="0">
+                <a:solidFill>
+                  <a:srgbClr val="FF0000"/>
+                </a:solidFill>
+              </a:rPr>
+              <a:t>他のパイプラインの入出力に使用</a:t>
             </a:r>
             <a:r>
               <a:rPr kumimoji="1" lang="ja-JP" altLang="en-US" sz="2400" dirty="0"/>
-              <a:t>から書きます（その３）</a:t>
+              <a:t>することができます。</a:t>
             </a:r>
             <a:endParaRPr kumimoji="1" lang="en-US" altLang="ja-JP" sz="2400" dirty="0"/>
           </a:p>
@@ -5471,10 +5392,10 @@
       </p:sp>
       <p:pic>
         <p:nvPicPr>
-          <p:cNvPr id="3" name="図 2">
-            <a:extLst>
-              <a:ext uri="{FF2B5EF4-FFF2-40B4-BE49-F238E27FC236}">
-                <a16:creationId xmlns:a16="http://schemas.microsoft.com/office/drawing/2014/main" id="{9936C593-FC74-453B-8986-F362EF0CBE48}"/>
+          <p:cNvPr id="10" name="図 9">
+            <a:extLst>
+              <a:ext uri="{FF2B5EF4-FFF2-40B4-BE49-F238E27FC236}">
+                <a16:creationId xmlns:a16="http://schemas.microsoft.com/office/drawing/2014/main" id="{0BC5D2FD-6077-462B-AD49-A2E7861989C4}"/>
               </a:ext>
             </a:extLst>
           </p:cNvPr>
@@ -5491,18 +5412,122 @@
         </p:blipFill>
         <p:spPr>
           <a:xfrm>
-            <a:off x="567543" y="1817794"/>
-            <a:ext cx="7322424" cy="4645237"/>
+            <a:off x="567542" y="2556458"/>
+            <a:ext cx="5637240" cy="3809588"/>
           </a:xfrm>
           <a:prstGeom prst="rect">
             <a:avLst/>
           </a:prstGeom>
         </p:spPr>
       </p:pic>
+      <p:sp>
+        <p:nvSpPr>
+          <p:cNvPr id="11" name="正方形/長方形 10">
+            <a:extLst>
+              <a:ext uri="{FF2B5EF4-FFF2-40B4-BE49-F238E27FC236}">
+                <a16:creationId xmlns:a16="http://schemas.microsoft.com/office/drawing/2014/main" id="{E25B4A41-6346-4C76-83D4-3E38E68F3F5E}"/>
+              </a:ext>
+            </a:extLst>
+          </p:cNvPr>
+          <p:cNvSpPr/>
+          <p:nvPr/>
+        </p:nvSpPr>
+        <p:spPr>
+          <a:xfrm>
+            <a:off x="3429000" y="2980267"/>
+            <a:ext cx="2150533" cy="1092200"/>
+          </a:xfrm>
+          <a:prstGeom prst="rect">
+            <a:avLst/>
+          </a:prstGeom>
+          <a:noFill/>
+          <a:ln w="38100">
+            <a:solidFill>
+              <a:srgbClr val="FF0000"/>
+            </a:solidFill>
+          </a:ln>
+        </p:spPr>
+        <p:style>
+          <a:lnRef idx="2">
+            <a:schemeClr val="accent1">
+              <a:shade val="50000"/>
+            </a:schemeClr>
+          </a:lnRef>
+          <a:fillRef idx="1">
+            <a:schemeClr val="accent1"/>
+          </a:fillRef>
+          <a:effectRef idx="0">
+            <a:schemeClr val="accent1"/>
+          </a:effectRef>
+          <a:fontRef idx="minor">
+            <a:schemeClr val="lt1"/>
+          </a:fontRef>
+        </p:style>
+        <p:txBody>
+          <a:bodyPr rtlCol="0" anchor="ctr"/>
+          <a:lstStyle/>
+          <a:p>
+            <a:pPr algn="ctr"/>
+            <a:endParaRPr kumimoji="1" lang="ja-JP" altLang="en-US"/>
+          </a:p>
+        </p:txBody>
+      </p:sp>
+      <p:sp>
+        <p:nvSpPr>
+          <p:cNvPr id="12" name="正方形/長方形 11">
+            <a:extLst>
+              <a:ext uri="{FF2B5EF4-FFF2-40B4-BE49-F238E27FC236}">
+                <a16:creationId xmlns:a16="http://schemas.microsoft.com/office/drawing/2014/main" id="{96BCCF8E-D7C9-4544-8630-4115325A2A18}"/>
+              </a:ext>
+            </a:extLst>
+          </p:cNvPr>
+          <p:cNvSpPr/>
+          <p:nvPr/>
+        </p:nvSpPr>
+        <p:spPr>
+          <a:xfrm>
+            <a:off x="4054249" y="4919134"/>
+            <a:ext cx="2150533" cy="1092200"/>
+          </a:xfrm>
+          <a:prstGeom prst="rect">
+            <a:avLst/>
+          </a:prstGeom>
+          <a:noFill/>
+          <a:ln w="38100">
+            <a:solidFill>
+              <a:srgbClr val="FF0000"/>
+            </a:solidFill>
+          </a:ln>
+        </p:spPr>
+        <p:style>
+          <a:lnRef idx="2">
+            <a:schemeClr val="accent1">
+              <a:shade val="50000"/>
+            </a:schemeClr>
+          </a:lnRef>
+          <a:fillRef idx="1">
+            <a:schemeClr val="accent1"/>
+          </a:fillRef>
+          <a:effectRef idx="0">
+            <a:schemeClr val="accent1"/>
+          </a:effectRef>
+          <a:fontRef idx="minor">
+            <a:schemeClr val="lt1"/>
+          </a:fontRef>
+        </p:style>
+        <p:txBody>
+          <a:bodyPr rtlCol="0" anchor="ctr"/>
+          <a:lstStyle/>
+          <a:p>
+            <a:pPr algn="ctr"/>
+            <a:endParaRPr kumimoji="1" lang="ja-JP" altLang="en-US"/>
+          </a:p>
+        </p:txBody>
+      </p:sp>
     </p:spTree>
     <p:extLst>
       <p:ext uri="{BB962C8B-B14F-4D97-AF65-F5344CB8AC3E}">
-        <p14:creationId xmlns:p14="http://schemas.microsoft.com/office/powerpoint/2010/main" val="2891181988"/>
+        <p14:creationId xmlns:p14="http://schemas.microsoft.com/office/powerpoint/2010/main" val="845505547"/>
       </p:ext>
     </p:extLst>
   </p:cSld>
@@ -5580,7 +5605,7 @@
         <p:spPr>
           <a:xfrm>
             <a:off x="567542" y="1216429"/>
-            <a:ext cx="8021748" cy="461665"/>
+            <a:ext cx="6575839" cy="461665"/>
           </a:xfrm>
           <a:prstGeom prst="rect">
             <a:avLst/>
@@ -5594,16 +5619,36 @@
           <a:lstStyle/>
           <a:p>
             <a:r>
-              <a:rPr kumimoji="1" lang="en-US" altLang="ja-JP" sz="2400" b="1" dirty="0" err="1">
+              <a:rPr kumimoji="1" lang="en-US" altLang="ja-JP" sz="2400" b="1" dirty="0">
+                <a:solidFill>
+                  <a:srgbClr val="0070C0"/>
+                </a:solidFill>
+              </a:rPr>
+              <a:t>vert</a:t>
+            </a:r>
+            <a:r>
+              <a:rPr kumimoji="1" lang="ja-JP" altLang="en-US" sz="2400" b="1" dirty="0">
+                <a:solidFill>
+                  <a:srgbClr val="0070C0"/>
+                </a:solidFill>
+              </a:rPr>
+              <a:t>関数</a:t>
+            </a:r>
+            <a:r>
+              <a:rPr kumimoji="1" lang="ja-JP" altLang="en-US" sz="2400" dirty="0"/>
+              <a:t>が</a:t>
+            </a:r>
+            <a:r>
+              <a:rPr kumimoji="1" lang="ja-JP" altLang="en-US" sz="2400" b="1" dirty="0">
                 <a:solidFill>
                   <a:srgbClr val="FF0000"/>
                 </a:solidFill>
               </a:rPr>
-              <a:t>NormalMesh_NoLight_VS.hlsl</a:t>
+              <a:t>頂点シェーダー</a:t>
             </a:r>
             <a:r>
               <a:rPr kumimoji="1" lang="ja-JP" altLang="en-US" sz="2400" dirty="0"/>
-              <a:t>から書きます（その４）</a:t>
+              <a:t>の処理となります。</a:t>
             </a:r>
             <a:endParaRPr kumimoji="1" lang="en-US" altLang="ja-JP" sz="2400" dirty="0"/>
           </a:p>
@@ -5611,10 +5656,10 @@
       </p:sp>
       <p:pic>
         <p:nvPicPr>
-          <p:cNvPr id="5" name="図 4">
-            <a:extLst>
-              <a:ext uri="{FF2B5EF4-FFF2-40B4-BE49-F238E27FC236}">
-                <a16:creationId xmlns:a16="http://schemas.microsoft.com/office/drawing/2014/main" id="{C46113A1-8571-4AD8-8814-46CA4DD72930}"/>
+          <p:cNvPr id="3" name="図 2">
+            <a:extLst>
+              <a:ext uri="{FF2B5EF4-FFF2-40B4-BE49-F238E27FC236}">
+                <a16:creationId xmlns:a16="http://schemas.microsoft.com/office/drawing/2014/main" id="{DD4BB9F0-2B2B-46B3-A061-FD4A6B26A5AB}"/>
               </a:ext>
             </a:extLst>
           </p:cNvPr>
@@ -5631,18 +5676,85 @@
         </p:blipFill>
         <p:spPr>
           <a:xfrm>
-            <a:off x="567542" y="1817794"/>
-            <a:ext cx="10842133" cy="4329006"/>
+            <a:off x="567542" y="1817793"/>
+            <a:ext cx="7860458" cy="2923539"/>
           </a:xfrm>
           <a:prstGeom prst="rect">
             <a:avLst/>
           </a:prstGeom>
         </p:spPr>
       </p:pic>
+      <p:sp>
+        <p:nvSpPr>
+          <p:cNvPr id="9" name="テキスト ボックス 8">
+            <a:extLst>
+              <a:ext uri="{FF2B5EF4-FFF2-40B4-BE49-F238E27FC236}">
+                <a16:creationId xmlns:a16="http://schemas.microsoft.com/office/drawing/2014/main" id="{27DDB45E-5380-47E7-9C3A-CC65E6CC36C5}"/>
+              </a:ext>
+            </a:extLst>
+          </p:cNvPr>
+          <p:cNvSpPr txBox="1"/>
+          <p:nvPr/>
+        </p:nvSpPr>
+        <p:spPr>
+          <a:xfrm>
+            <a:off x="567542" y="4741332"/>
+            <a:ext cx="9725739" cy="830997"/>
+          </a:xfrm>
+          <a:prstGeom prst="rect">
+            <a:avLst/>
+          </a:prstGeom>
+          <a:noFill/>
+        </p:spPr>
+        <p:txBody>
+          <a:bodyPr wrap="none" rtlCol="0">
+            <a:spAutoFit/>
+          </a:bodyPr>
+          <a:lstStyle/>
+          <a:p>
+            <a:r>
+              <a:rPr kumimoji="1" lang="ja-JP" altLang="en-US" sz="2400" dirty="0"/>
+              <a:t>頂点の</a:t>
+            </a:r>
+            <a:r>
+              <a:rPr kumimoji="1" lang="ja-JP" altLang="en-US" sz="2400" b="1" dirty="0">
+                <a:solidFill>
+                  <a:srgbClr val="FF0000"/>
+                </a:solidFill>
+              </a:rPr>
+              <a:t>座標変換（射影座標）</a:t>
+            </a:r>
+            <a:r>
+              <a:rPr kumimoji="1" lang="ja-JP" altLang="en-US" sz="2400" dirty="0"/>
+              <a:t>と</a:t>
+            </a:r>
+            <a:r>
+              <a:rPr kumimoji="1" lang="ja-JP" altLang="en-US" sz="2400" b="1" dirty="0">
+                <a:solidFill>
+                  <a:srgbClr val="FF0000"/>
+                </a:solidFill>
+              </a:rPr>
+              <a:t>テクスチャ座標の設定</a:t>
+            </a:r>
+            <a:r>
+              <a:rPr kumimoji="1" lang="ja-JP" altLang="en-US" sz="2400" dirty="0"/>
+              <a:t>をしています。</a:t>
+            </a:r>
+            <a:endParaRPr kumimoji="1" lang="en-US" altLang="ja-JP" sz="2400" dirty="0"/>
+          </a:p>
+          <a:p>
+            <a:r>
+              <a:rPr lang="ja-JP" altLang="en-US" sz="2400" dirty="0"/>
+              <a:t>これがないとモデルが正しい位置に表示されません。</a:t>
+            </a:r>
+            <a:endParaRPr kumimoji="1" lang="en-US" altLang="ja-JP" sz="2400" dirty="0"/>
+          </a:p>
+        </p:txBody>
+      </p:sp>
     </p:spTree>
     <p:extLst>
       <p:ext uri="{BB962C8B-B14F-4D97-AF65-F5344CB8AC3E}">
-        <p14:creationId xmlns:p14="http://schemas.microsoft.com/office/powerpoint/2010/main" val="1616361148"/>
+        <p14:creationId xmlns:p14="http://schemas.microsoft.com/office/powerpoint/2010/main" val="1504047286"/>
       </p:ext>
     </p:extLst>
   </p:cSld>
@@ -5720,7 +5832,7 @@
         <p:spPr>
           <a:xfrm>
             <a:off x="567542" y="1216429"/>
-            <a:ext cx="8021748" cy="461665"/>
+            <a:ext cx="7242688" cy="461665"/>
           </a:xfrm>
           <a:prstGeom prst="rect">
             <a:avLst/>
@@ -5734,16 +5846,88 @@
           <a:lstStyle/>
           <a:p>
             <a:r>
-              <a:rPr kumimoji="1" lang="en-US" altLang="ja-JP" sz="2400" b="1" dirty="0" err="1">
+              <a:rPr kumimoji="1" lang="en-US" altLang="ja-JP" sz="2400" b="1" dirty="0">
+                <a:solidFill>
+                  <a:srgbClr val="0070C0"/>
+                </a:solidFill>
+              </a:rPr>
+              <a:t>frag</a:t>
+            </a:r>
+            <a:r>
+              <a:rPr kumimoji="1" lang="ja-JP" altLang="en-US" sz="2400" b="1" dirty="0">
+                <a:solidFill>
+                  <a:srgbClr val="0070C0"/>
+                </a:solidFill>
+              </a:rPr>
+              <a:t>関数</a:t>
+            </a:r>
+            <a:r>
+              <a:rPr kumimoji="1" lang="ja-JP" altLang="en-US" sz="2400" dirty="0"/>
+              <a:t>が</a:t>
+            </a:r>
+            <a:r>
+              <a:rPr kumimoji="1" lang="ja-JP" altLang="en-US" sz="2400" b="1" dirty="0">
                 <a:solidFill>
                   <a:srgbClr val="FF0000"/>
                 </a:solidFill>
               </a:rPr>
-              <a:t>NormalMesh_NoLight_VS.hlsl</a:t>
+              <a:t>ピクセルシェーダー</a:t>
             </a:r>
             <a:r>
               <a:rPr kumimoji="1" lang="ja-JP" altLang="en-US" sz="2400" dirty="0"/>
-              <a:t>から書きます（その５）</a:t>
+              <a:t>の処理となります。</a:t>
+            </a:r>
+            <a:endParaRPr kumimoji="1" lang="en-US" altLang="ja-JP" sz="2400" dirty="0"/>
+          </a:p>
+        </p:txBody>
+      </p:sp>
+      <p:sp>
+        <p:nvSpPr>
+          <p:cNvPr id="9" name="テキスト ボックス 8">
+            <a:extLst>
+              <a:ext uri="{FF2B5EF4-FFF2-40B4-BE49-F238E27FC236}">
+                <a16:creationId xmlns:a16="http://schemas.microsoft.com/office/drawing/2014/main" id="{27DDB45E-5380-47E7-9C3A-CC65E6CC36C5}"/>
+              </a:ext>
+            </a:extLst>
+          </p:cNvPr>
+          <p:cNvSpPr txBox="1"/>
+          <p:nvPr/>
+        </p:nvSpPr>
+        <p:spPr>
+          <a:xfrm>
+            <a:off x="567542" y="4741332"/>
+            <a:ext cx="10461518" cy="461665"/>
+          </a:xfrm>
+          <a:prstGeom prst="rect">
+            <a:avLst/>
+          </a:prstGeom>
+          <a:noFill/>
+        </p:spPr>
+        <p:txBody>
+          <a:bodyPr wrap="none" rtlCol="0">
+            <a:spAutoFit/>
+          </a:bodyPr>
+          <a:lstStyle/>
+          <a:p>
+            <a:r>
+              <a:rPr kumimoji="1" lang="en-US" altLang="ja-JP" sz="2400" b="1" dirty="0">
+                <a:solidFill>
+                  <a:srgbClr val="FF0000"/>
+                </a:solidFill>
+              </a:rPr>
+              <a:t>UV</a:t>
+            </a:r>
+            <a:r>
+              <a:rPr kumimoji="1" lang="ja-JP" altLang="en-US" sz="2400" b="1" dirty="0">
+                <a:solidFill>
+                  <a:srgbClr val="FF0000"/>
+                </a:solidFill>
+              </a:rPr>
+              <a:t>座標が示すテクスチャーの色を取得</a:t>
+            </a:r>
+            <a:r>
+              <a:rPr kumimoji="1" lang="ja-JP" altLang="en-US" sz="2400" dirty="0"/>
+              <a:t>し、次のパイプラインへ送ります。</a:t>
             </a:r>
             <a:endParaRPr kumimoji="1" lang="en-US" altLang="ja-JP" sz="2400" dirty="0"/>
           </a:p>
@@ -5751,10 +5935,10 @@
       </p:sp>
       <p:pic>
         <p:nvPicPr>
-          <p:cNvPr id="8" name="図 7">
-            <a:extLst>
-              <a:ext uri="{FF2B5EF4-FFF2-40B4-BE49-F238E27FC236}">
-                <a16:creationId xmlns:a16="http://schemas.microsoft.com/office/drawing/2014/main" id="{F468C0FF-8428-4C49-9A57-A38211FA4131}"/>
+          <p:cNvPr id="5" name="図 4">
+            <a:extLst>
+              <a:ext uri="{FF2B5EF4-FFF2-40B4-BE49-F238E27FC236}">
+                <a16:creationId xmlns:a16="http://schemas.microsoft.com/office/drawing/2014/main" id="{6CE6AE4C-27D5-42BC-9FAD-BFDF9C5DFC07}"/>
               </a:ext>
             </a:extLst>
           </p:cNvPr>
@@ -5771,54 +5955,18 @@
         </p:blipFill>
         <p:spPr>
           <a:xfrm>
-            <a:off x="567542" y="1817795"/>
-            <a:ext cx="11345058" cy="2051694"/>
+            <a:off x="567542" y="1817794"/>
+            <a:ext cx="6352139" cy="2796539"/>
           </a:xfrm>
           <a:prstGeom prst="rect">
             <a:avLst/>
           </a:prstGeom>
         </p:spPr>
       </p:pic>
-      <p:sp>
-        <p:nvSpPr>
-          <p:cNvPr id="9" name="テキスト ボックス 8">
-            <a:extLst>
-              <a:ext uri="{FF2B5EF4-FFF2-40B4-BE49-F238E27FC236}">
-                <a16:creationId xmlns:a16="http://schemas.microsoft.com/office/drawing/2014/main" id="{5F067389-962F-41D2-8DE0-34BD4E2DBB0E}"/>
-              </a:ext>
-            </a:extLst>
-          </p:cNvPr>
-          <p:cNvSpPr txBox="1"/>
-          <p:nvPr/>
-        </p:nvSpPr>
-        <p:spPr>
-          <a:xfrm>
-            <a:off x="567542" y="4015118"/>
-            <a:ext cx="4801314" cy="461665"/>
-          </a:xfrm>
-          <a:prstGeom prst="rect">
-            <a:avLst/>
-          </a:prstGeom>
-          <a:noFill/>
-        </p:spPr>
-        <p:txBody>
-          <a:bodyPr wrap="none" rtlCol="0">
-            <a:spAutoFit/>
-          </a:bodyPr>
-          <a:lstStyle/>
-          <a:p>
-            <a:r>
-              <a:rPr kumimoji="1" lang="ja-JP" altLang="en-US" sz="2400" dirty="0"/>
-              <a:t>後程、何を書いたか説明します。</a:t>
-            </a:r>
-            <a:endParaRPr kumimoji="1" lang="en-US" altLang="ja-JP" sz="2400" dirty="0"/>
-          </a:p>
-        </p:txBody>
-      </p:sp>
     </p:spTree>
     <p:extLst>
       <p:ext uri="{BB962C8B-B14F-4D97-AF65-F5344CB8AC3E}">
-        <p14:creationId xmlns:p14="http://schemas.microsoft.com/office/powerpoint/2010/main" val="1061474887"/>
+        <p14:creationId xmlns:p14="http://schemas.microsoft.com/office/powerpoint/2010/main" val="1243758150"/>
       </p:ext>
     </p:extLst>
   </p:cSld>
@@ -5896,7 +6044,7 @@
         <p:spPr>
           <a:xfrm>
             <a:off x="567542" y="1216429"/>
-            <a:ext cx="7715574" cy="461665"/>
+            <a:ext cx="6856364" cy="830997"/>
           </a:xfrm>
           <a:prstGeom prst="rect">
             <a:avLst/>
@@ -5910,18 +6058,41 @@
           <a:lstStyle/>
           <a:p>
             <a:r>
-              <a:rPr kumimoji="1" lang="en-US" altLang="ja-JP" sz="2400" b="1" dirty="0" err="1">
+              <a:rPr kumimoji="1" lang="en-US" altLang="ja-JP" sz="2400" dirty="0"/>
+              <a:t>Assets</a:t>
+            </a:r>
+            <a:r>
+              <a:rPr kumimoji="1" lang="ja-JP" altLang="en-US" sz="2400" dirty="0"/>
+              <a:t>フォルダに</a:t>
+            </a:r>
+            <a:r>
+              <a:rPr kumimoji="1" lang="en-US" altLang="ja-JP" sz="2400" b="1" dirty="0">
                 <a:solidFill>
                   <a:srgbClr val="FF0000"/>
                 </a:solidFill>
               </a:rPr>
-              <a:t>NormalMesh_NoLight_PS.hlsl</a:t>
+              <a:t>Materials</a:t>
+            </a:r>
+            <a:r>
+              <a:rPr kumimoji="1" lang="ja-JP" altLang="en-US" sz="2400" b="1" dirty="0">
+                <a:solidFill>
+                  <a:srgbClr val="FF0000"/>
+                </a:solidFill>
+              </a:rPr>
+              <a:t>フォルダ</a:t>
             </a:r>
             <a:r>
               <a:rPr kumimoji="1" lang="ja-JP" altLang="en-US" sz="2400" dirty="0"/>
-              <a:t>を書きます（その１）</a:t>
+              <a:t>を作成し、</a:t>
             </a:r>
             <a:endParaRPr kumimoji="1" lang="en-US" altLang="ja-JP" sz="2400" dirty="0"/>
+          </a:p>
+          <a:p>
+            <a:r>
+              <a:rPr lang="ja-JP" altLang="en-US" sz="2400" dirty="0"/>
+              <a:t>マテリアルを追加しましょう。</a:t>
+            </a:r>
+            <a:endParaRPr lang="en-US" altLang="ja-JP" sz="2400" dirty="0"/>
           </a:p>
         </p:txBody>
       </p:sp>
@@ -5930,7 +6101,7 @@
           <p:cNvPr id="3" name="図 2">
             <a:extLst>
               <a:ext uri="{FF2B5EF4-FFF2-40B4-BE49-F238E27FC236}">
-                <a16:creationId xmlns:a16="http://schemas.microsoft.com/office/drawing/2014/main" id="{1FEB944C-2225-4F8E-BBA1-E6ECF039B94C}"/>
+                <a16:creationId xmlns:a16="http://schemas.microsoft.com/office/drawing/2014/main" id="{8C885712-4AA8-4FD3-86A5-C7D0A7A1B43A}"/>
               </a:ext>
             </a:extLst>
           </p:cNvPr>
@@ -5947,8 +6118,8 @@
         </p:blipFill>
         <p:spPr>
           <a:xfrm>
-            <a:off x="567542" y="1817795"/>
-            <a:ext cx="9211458" cy="4627766"/>
+            <a:off x="567541" y="2187125"/>
+            <a:ext cx="4996149" cy="3815741"/>
           </a:xfrm>
           <a:prstGeom prst="rect">
             <a:avLst/>
@@ -5958,7 +6129,7 @@
     </p:spTree>
     <p:extLst>
       <p:ext uri="{BB962C8B-B14F-4D97-AF65-F5344CB8AC3E}">
-        <p14:creationId xmlns:p14="http://schemas.microsoft.com/office/powerpoint/2010/main" val="1563534638"/>
+        <p14:creationId xmlns:p14="http://schemas.microsoft.com/office/powerpoint/2010/main" val="3061694870"/>
       </p:ext>
     </p:extLst>
   </p:cSld>
@@ -6036,7 +6207,7 @@
         <p:spPr>
           <a:xfrm>
             <a:off x="567542" y="1216429"/>
-            <a:ext cx="7715574" cy="461665"/>
+            <a:ext cx="8802410" cy="830997"/>
           </a:xfrm>
           <a:prstGeom prst="rect">
             <a:avLst/>
@@ -6050,18 +6221,17 @@
           <a:lstStyle/>
           <a:p>
             <a:r>
-              <a:rPr kumimoji="1" lang="en-US" altLang="ja-JP" sz="2400" b="1" dirty="0" err="1">
-                <a:solidFill>
-                  <a:srgbClr val="FF0000"/>
-                </a:solidFill>
-              </a:rPr>
-              <a:t>NormalMesh_NoLight_PS.hlsl</a:t>
-            </a:r>
-            <a:r>
               <a:rPr kumimoji="1" lang="ja-JP" altLang="en-US" sz="2400" dirty="0"/>
-              <a:t>を書きます（その２）</a:t>
+              <a:t>マテリアルのインスペクターから、</a:t>
             </a:r>
             <a:endParaRPr kumimoji="1" lang="en-US" altLang="ja-JP" sz="2400" dirty="0"/>
+          </a:p>
+          <a:p>
+            <a:r>
+              <a:rPr lang="ja-JP" altLang="en-US" sz="2400" dirty="0"/>
+              <a:t>先ほど追加したシェーダーで描画するように設定しましょう。</a:t>
+            </a:r>
+            <a:endParaRPr lang="en-US" altLang="ja-JP" sz="2400" dirty="0"/>
           </a:p>
         </p:txBody>
       </p:sp>
@@ -6070,7 +6240,7 @@
           <p:cNvPr id="5" name="図 4">
             <a:extLst>
               <a:ext uri="{FF2B5EF4-FFF2-40B4-BE49-F238E27FC236}">
-                <a16:creationId xmlns:a16="http://schemas.microsoft.com/office/drawing/2014/main" id="{C9194488-1E20-4357-A144-92F7694012B2}"/>
+                <a16:creationId xmlns:a16="http://schemas.microsoft.com/office/drawing/2014/main" id="{FC4E4BC1-F825-4C9B-B6F8-FAC6F96375FA}"/>
               </a:ext>
             </a:extLst>
           </p:cNvPr>
@@ -6087,18 +6257,72 @@
         </p:blipFill>
         <p:spPr>
           <a:xfrm>
-            <a:off x="567542" y="1817794"/>
-            <a:ext cx="8652658" cy="4569082"/>
+            <a:off x="567542" y="2187126"/>
+            <a:ext cx="6716152" cy="3454445"/>
           </a:xfrm>
           <a:prstGeom prst="rect">
             <a:avLst/>
           </a:prstGeom>
         </p:spPr>
       </p:pic>
+      <p:sp>
+        <p:nvSpPr>
+          <p:cNvPr id="7" name="矢印: 右 6">
+            <a:extLst>
+              <a:ext uri="{FF2B5EF4-FFF2-40B4-BE49-F238E27FC236}">
+                <a16:creationId xmlns:a16="http://schemas.microsoft.com/office/drawing/2014/main" id="{4023E28B-A8C8-449D-B642-594789DD6503}"/>
+              </a:ext>
+            </a:extLst>
+          </p:cNvPr>
+          <p:cNvSpPr/>
+          <p:nvPr/>
+        </p:nvSpPr>
+        <p:spPr>
+          <a:xfrm rot="13646482">
+            <a:off x="3677949" y="3268133"/>
+            <a:ext cx="495336" cy="321733"/>
+          </a:xfrm>
+          <a:prstGeom prst="rightArrow">
+            <a:avLst/>
+          </a:prstGeom>
+          <a:solidFill>
+            <a:srgbClr val="FF0000"/>
+          </a:solidFill>
+          <a:ln>
+            <a:solidFill>
+              <a:schemeClr val="tx1"/>
+            </a:solidFill>
+          </a:ln>
+        </p:spPr>
+        <p:style>
+          <a:lnRef idx="2">
+            <a:schemeClr val="accent1">
+              <a:shade val="50000"/>
+            </a:schemeClr>
+          </a:lnRef>
+          <a:fillRef idx="1">
+            <a:schemeClr val="accent1"/>
+          </a:fillRef>
+          <a:effectRef idx="0">
+            <a:schemeClr val="accent1"/>
+          </a:effectRef>
+          <a:fontRef idx="minor">
+            <a:schemeClr val="lt1"/>
+          </a:fontRef>
+        </p:style>
+        <p:txBody>
+          <a:bodyPr rtlCol="0" anchor="ctr"/>
+          <a:lstStyle/>
+          <a:p>
+            <a:pPr algn="ctr"/>
+            <a:endParaRPr kumimoji="1" lang="ja-JP" altLang="en-US"/>
+          </a:p>
+        </p:txBody>
+      </p:sp>
     </p:spTree>
     <p:extLst>
       <p:ext uri="{BB962C8B-B14F-4D97-AF65-F5344CB8AC3E}">
-        <p14:creationId xmlns:p14="http://schemas.microsoft.com/office/powerpoint/2010/main" val="1302716509"/>
+        <p14:creationId xmlns:p14="http://schemas.microsoft.com/office/powerpoint/2010/main" val="3277423685"/>
       </p:ext>
     </p:extLst>
   </p:cSld>

--- a/ゲーム科2年/01_後期/ゲームプログラミング応用Ⅰ/01_HLSL.pptx
+++ b/ゲーム科2年/01_後期/ゲームプログラミング応用Ⅰ/01_HLSL.pptx
@@ -273,7 +273,7 @@
           <a:p>
             <a:fld id="{E9CC885B-4903-4D54-9A93-00025F12DED9}" type="datetimeFigureOut">
               <a:rPr kumimoji="1" lang="ja-JP" altLang="en-US" smtClean="0"/>
-              <a:t>2025/7/17</a:t>
+              <a:t>2025/7/25</a:t>
             </a:fld>
             <a:endParaRPr kumimoji="1" lang="ja-JP" altLang="en-US"/>
           </a:p>
@@ -503,7 +503,7 @@
           <a:p>
             <a:fld id="{E9CC885B-4903-4D54-9A93-00025F12DED9}" type="datetimeFigureOut">
               <a:rPr kumimoji="1" lang="ja-JP" altLang="en-US" smtClean="0"/>
-              <a:t>2025/7/17</a:t>
+              <a:t>2025/7/25</a:t>
             </a:fld>
             <a:endParaRPr kumimoji="1" lang="ja-JP" altLang="en-US"/>
           </a:p>
@@ -743,7 +743,7 @@
           <a:p>
             <a:fld id="{E9CC885B-4903-4D54-9A93-00025F12DED9}" type="datetimeFigureOut">
               <a:rPr kumimoji="1" lang="ja-JP" altLang="en-US" smtClean="0"/>
-              <a:t>2025/7/17</a:t>
+              <a:t>2025/7/25</a:t>
             </a:fld>
             <a:endParaRPr kumimoji="1" lang="ja-JP" altLang="en-US"/>
           </a:p>
@@ -973,7 +973,7 @@
           <a:p>
             <a:fld id="{E9CC885B-4903-4D54-9A93-00025F12DED9}" type="datetimeFigureOut">
               <a:rPr kumimoji="1" lang="ja-JP" altLang="en-US" smtClean="0"/>
-              <a:t>2025/7/17</a:t>
+              <a:t>2025/7/25</a:t>
             </a:fld>
             <a:endParaRPr kumimoji="1" lang="ja-JP" altLang="en-US"/>
           </a:p>
@@ -1248,7 +1248,7 @@
           <a:p>
             <a:fld id="{E9CC885B-4903-4D54-9A93-00025F12DED9}" type="datetimeFigureOut">
               <a:rPr kumimoji="1" lang="ja-JP" altLang="en-US" smtClean="0"/>
-              <a:t>2025/7/17</a:t>
+              <a:t>2025/7/25</a:t>
             </a:fld>
             <a:endParaRPr kumimoji="1" lang="ja-JP" altLang="en-US"/>
           </a:p>
@@ -1577,7 +1577,7 @@
           <a:p>
             <a:fld id="{E9CC885B-4903-4D54-9A93-00025F12DED9}" type="datetimeFigureOut">
               <a:rPr kumimoji="1" lang="ja-JP" altLang="en-US" smtClean="0"/>
-              <a:t>2025/7/17</a:t>
+              <a:t>2025/7/25</a:t>
             </a:fld>
             <a:endParaRPr kumimoji="1" lang="ja-JP" altLang="en-US"/>
           </a:p>
@@ -2053,7 +2053,7 @@
           <a:p>
             <a:fld id="{E9CC885B-4903-4D54-9A93-00025F12DED9}" type="datetimeFigureOut">
               <a:rPr kumimoji="1" lang="ja-JP" altLang="en-US" smtClean="0"/>
-              <a:t>2025/7/17</a:t>
+              <a:t>2025/7/25</a:t>
             </a:fld>
             <a:endParaRPr kumimoji="1" lang="ja-JP" altLang="en-US"/>
           </a:p>
@@ -2194,7 +2194,7 @@
           <a:p>
             <a:fld id="{E9CC885B-4903-4D54-9A93-00025F12DED9}" type="datetimeFigureOut">
               <a:rPr kumimoji="1" lang="ja-JP" altLang="en-US" smtClean="0"/>
-              <a:t>2025/7/17</a:t>
+              <a:t>2025/7/25</a:t>
             </a:fld>
             <a:endParaRPr kumimoji="1" lang="ja-JP" altLang="en-US"/>
           </a:p>
@@ -2307,7 +2307,7 @@
           <a:p>
             <a:fld id="{E9CC885B-4903-4D54-9A93-00025F12DED9}" type="datetimeFigureOut">
               <a:rPr kumimoji="1" lang="ja-JP" altLang="en-US" smtClean="0"/>
-              <a:t>2025/7/17</a:t>
+              <a:t>2025/7/25</a:t>
             </a:fld>
             <a:endParaRPr kumimoji="1" lang="ja-JP" altLang="en-US"/>
           </a:p>
@@ -2650,7 +2650,7 @@
           <a:p>
             <a:fld id="{E9CC885B-4903-4D54-9A93-00025F12DED9}" type="datetimeFigureOut">
               <a:rPr kumimoji="1" lang="ja-JP" altLang="en-US" smtClean="0"/>
-              <a:t>2025/7/17</a:t>
+              <a:t>2025/7/25</a:t>
             </a:fld>
             <a:endParaRPr kumimoji="1" lang="ja-JP" altLang="en-US"/>
           </a:p>
@@ -2938,7 +2938,7 @@
           <a:p>
             <a:fld id="{E9CC885B-4903-4D54-9A93-00025F12DED9}" type="datetimeFigureOut">
               <a:rPr kumimoji="1" lang="ja-JP" altLang="en-US" smtClean="0"/>
-              <a:t>2025/7/17</a:t>
+              <a:t>2025/7/25</a:t>
             </a:fld>
             <a:endParaRPr kumimoji="1" lang="ja-JP" altLang="en-US"/>
           </a:p>
@@ -3211,7 +3211,7 @@
           <a:p>
             <a:fld id="{E9CC885B-4903-4D54-9A93-00025F12DED9}" type="datetimeFigureOut">
               <a:rPr kumimoji="1" lang="ja-JP" altLang="en-US" smtClean="0"/>
-              <a:t>2025/7/17</a:t>
+              <a:t>2025/7/25</a:t>
             </a:fld>
             <a:endParaRPr kumimoji="1" lang="ja-JP" altLang="en-US"/>
           </a:p>
@@ -4619,7 +4619,7 @@
                   <a:srgbClr val="FF0000"/>
                 </a:solidFill>
               </a:rPr>
-              <a:t>頂点の位置をいじりたい場合は頂点シェーダー</a:t>
+              <a:t>頂点をいじりたい場合は頂点シェーダー</a:t>
             </a:r>
             <a:r>
               <a:rPr lang="ja-JP" altLang="en-US" sz="2400" dirty="0"/>

--- a/ゲーム科2年/01_後期/ゲームプログラミング応用Ⅰ/01_HLSL.pptx
+++ b/ゲーム科2年/01_後期/ゲームプログラミング応用Ⅰ/01_HLSL.pptx
@@ -273,7 +273,7 @@
           <a:p>
             <a:fld id="{E9CC885B-4903-4D54-9A93-00025F12DED9}" type="datetimeFigureOut">
               <a:rPr kumimoji="1" lang="ja-JP" altLang="en-US" smtClean="0"/>
-              <a:t>2025/7/25</a:t>
+              <a:t>2025/7/28</a:t>
             </a:fld>
             <a:endParaRPr kumimoji="1" lang="ja-JP" altLang="en-US"/>
           </a:p>
@@ -503,7 +503,7 @@
           <a:p>
             <a:fld id="{E9CC885B-4903-4D54-9A93-00025F12DED9}" type="datetimeFigureOut">
               <a:rPr kumimoji="1" lang="ja-JP" altLang="en-US" smtClean="0"/>
-              <a:t>2025/7/25</a:t>
+              <a:t>2025/7/28</a:t>
             </a:fld>
             <a:endParaRPr kumimoji="1" lang="ja-JP" altLang="en-US"/>
           </a:p>
@@ -743,7 +743,7 @@
           <a:p>
             <a:fld id="{E9CC885B-4903-4D54-9A93-00025F12DED9}" type="datetimeFigureOut">
               <a:rPr kumimoji="1" lang="ja-JP" altLang="en-US" smtClean="0"/>
-              <a:t>2025/7/25</a:t>
+              <a:t>2025/7/28</a:t>
             </a:fld>
             <a:endParaRPr kumimoji="1" lang="ja-JP" altLang="en-US"/>
           </a:p>
@@ -973,7 +973,7 @@
           <a:p>
             <a:fld id="{E9CC885B-4903-4D54-9A93-00025F12DED9}" type="datetimeFigureOut">
               <a:rPr kumimoji="1" lang="ja-JP" altLang="en-US" smtClean="0"/>
-              <a:t>2025/7/25</a:t>
+              <a:t>2025/7/28</a:t>
             </a:fld>
             <a:endParaRPr kumimoji="1" lang="ja-JP" altLang="en-US"/>
           </a:p>
@@ -1248,7 +1248,7 @@
           <a:p>
             <a:fld id="{E9CC885B-4903-4D54-9A93-00025F12DED9}" type="datetimeFigureOut">
               <a:rPr kumimoji="1" lang="ja-JP" altLang="en-US" smtClean="0"/>
-              <a:t>2025/7/25</a:t>
+              <a:t>2025/7/28</a:t>
             </a:fld>
             <a:endParaRPr kumimoji="1" lang="ja-JP" altLang="en-US"/>
           </a:p>
@@ -1577,7 +1577,7 @@
           <a:p>
             <a:fld id="{E9CC885B-4903-4D54-9A93-00025F12DED9}" type="datetimeFigureOut">
               <a:rPr kumimoji="1" lang="ja-JP" altLang="en-US" smtClean="0"/>
-              <a:t>2025/7/25</a:t>
+              <a:t>2025/7/28</a:t>
             </a:fld>
             <a:endParaRPr kumimoji="1" lang="ja-JP" altLang="en-US"/>
           </a:p>
@@ -2053,7 +2053,7 @@
           <a:p>
             <a:fld id="{E9CC885B-4903-4D54-9A93-00025F12DED9}" type="datetimeFigureOut">
               <a:rPr kumimoji="1" lang="ja-JP" altLang="en-US" smtClean="0"/>
-              <a:t>2025/7/25</a:t>
+              <a:t>2025/7/28</a:t>
             </a:fld>
             <a:endParaRPr kumimoji="1" lang="ja-JP" altLang="en-US"/>
           </a:p>
@@ -2194,7 +2194,7 @@
           <a:p>
             <a:fld id="{E9CC885B-4903-4D54-9A93-00025F12DED9}" type="datetimeFigureOut">
               <a:rPr kumimoji="1" lang="ja-JP" altLang="en-US" smtClean="0"/>
-              <a:t>2025/7/25</a:t>
+              <a:t>2025/7/28</a:t>
             </a:fld>
             <a:endParaRPr kumimoji="1" lang="ja-JP" altLang="en-US"/>
           </a:p>
@@ -2307,7 +2307,7 @@
           <a:p>
             <a:fld id="{E9CC885B-4903-4D54-9A93-00025F12DED9}" type="datetimeFigureOut">
               <a:rPr kumimoji="1" lang="ja-JP" altLang="en-US" smtClean="0"/>
-              <a:t>2025/7/25</a:t>
+              <a:t>2025/7/28</a:t>
             </a:fld>
             <a:endParaRPr kumimoji="1" lang="ja-JP" altLang="en-US"/>
           </a:p>
@@ -2650,7 +2650,7 @@
           <a:p>
             <a:fld id="{E9CC885B-4903-4D54-9A93-00025F12DED9}" type="datetimeFigureOut">
               <a:rPr kumimoji="1" lang="ja-JP" altLang="en-US" smtClean="0"/>
-              <a:t>2025/7/25</a:t>
+              <a:t>2025/7/28</a:t>
             </a:fld>
             <a:endParaRPr kumimoji="1" lang="ja-JP" altLang="en-US"/>
           </a:p>
@@ -2938,7 +2938,7 @@
           <a:p>
             <a:fld id="{E9CC885B-4903-4D54-9A93-00025F12DED9}" type="datetimeFigureOut">
               <a:rPr kumimoji="1" lang="ja-JP" altLang="en-US" smtClean="0"/>
-              <a:t>2025/7/25</a:t>
+              <a:t>2025/7/28</a:t>
             </a:fld>
             <a:endParaRPr kumimoji="1" lang="ja-JP" altLang="en-US"/>
           </a:p>
@@ -3211,7 +3211,7 @@
           <a:p>
             <a:fld id="{E9CC885B-4903-4D54-9A93-00025F12DED9}" type="datetimeFigureOut">
               <a:rPr kumimoji="1" lang="ja-JP" altLang="en-US" smtClean="0"/>
-              <a:t>2025/7/25</a:t>
+              <a:t>2025/7/28</a:t>
             </a:fld>
             <a:endParaRPr kumimoji="1" lang="ja-JP" altLang="en-US"/>
           </a:p>
@@ -3927,6 +3927,70 @@
           </a:prstGeom>
         </p:spPr>
       </p:pic>
+      <p:sp>
+        <p:nvSpPr>
+          <p:cNvPr id="5" name="テキスト ボックス 4">
+            <a:extLst>
+              <a:ext uri="{FF2B5EF4-FFF2-40B4-BE49-F238E27FC236}">
+                <a16:creationId xmlns:a16="http://schemas.microsoft.com/office/drawing/2014/main" id="{D42347FA-DA7B-495D-B033-1FB95EB96DC6}"/>
+              </a:ext>
+            </a:extLst>
+          </p:cNvPr>
+          <p:cNvSpPr txBox="1"/>
+          <p:nvPr/>
+        </p:nvSpPr>
+        <p:spPr>
+          <a:xfrm>
+            <a:off x="5426413" y="4623089"/>
+            <a:ext cx="4493538" cy="1569660"/>
+          </a:xfrm>
+          <a:prstGeom prst="rect">
+            <a:avLst/>
+          </a:prstGeom>
+          <a:noFill/>
+        </p:spPr>
+        <p:txBody>
+          <a:bodyPr wrap="none" rtlCol="0">
+            <a:spAutoFit/>
+          </a:bodyPr>
+          <a:lstStyle/>
+          <a:p>
+            <a:r>
+              <a:rPr lang="en-US" altLang="ja-JP" sz="2400" b="1" dirty="0">
+                <a:solidFill>
+                  <a:srgbClr val="00B050"/>
+                </a:solidFill>
+              </a:rPr>
+              <a:t>MEMO</a:t>
+            </a:r>
+          </a:p>
+          <a:p>
+            <a:r>
+              <a:rPr lang="en-US" altLang="ja-JP" sz="2400" dirty="0"/>
+              <a:t>Unlit</a:t>
+            </a:r>
+            <a:r>
+              <a:rPr lang="ja-JP" altLang="en-US" sz="2400" dirty="0"/>
+              <a:t>はつまり</a:t>
+            </a:r>
+            <a:endParaRPr lang="en-US" altLang="ja-JP" sz="2400" dirty="0"/>
+          </a:p>
+          <a:p>
+            <a:r>
+              <a:rPr lang="ja-JP" altLang="en-US" sz="2400" dirty="0"/>
+              <a:t>ライトを無視した状態のこと。</a:t>
+            </a:r>
+            <a:endParaRPr lang="en-US" altLang="ja-JP" sz="2400" dirty="0"/>
+          </a:p>
+          <a:p>
+            <a:r>
+              <a:rPr lang="ja-JP" altLang="en-US" sz="2400" dirty="0"/>
+              <a:t>影もテカリもできない。</a:t>
+            </a:r>
+            <a:endParaRPr lang="en-US" altLang="ja-JP" sz="2400" dirty="0"/>
+          </a:p>
+        </p:txBody>
+      </p:sp>
     </p:spTree>
     <p:extLst>
       <p:ext uri="{BB962C8B-B14F-4D97-AF65-F5344CB8AC3E}">
@@ -5896,7 +5960,7 @@
         <p:spPr>
           <a:xfrm>
             <a:off x="567542" y="4741332"/>
-            <a:ext cx="10461518" cy="461665"/>
+            <a:ext cx="10482357" cy="1569660"/>
           </a:xfrm>
           <a:prstGeom prst="rect">
             <a:avLst/>
@@ -5928,6 +5992,27 @@
             <a:r>
               <a:rPr kumimoji="1" lang="ja-JP" altLang="en-US" sz="2400" dirty="0"/>
               <a:t>し、次のパイプラインへ送ります。</a:t>
+            </a:r>
+            <a:endParaRPr kumimoji="1" lang="en-US" altLang="ja-JP" sz="2400" dirty="0"/>
+          </a:p>
+          <a:p>
+            <a:endParaRPr lang="en-US" altLang="ja-JP" sz="2400" dirty="0"/>
+          </a:p>
+          <a:p>
+            <a:r>
+              <a:rPr kumimoji="1" lang="en-US" altLang="ja-JP" sz="2400" dirty="0"/>
+              <a:t>※Unity</a:t>
+            </a:r>
+            <a:r>
+              <a:rPr kumimoji="1" lang="ja-JP" altLang="en-US" sz="2400" dirty="0"/>
+              <a:t>ではフラグメントシェーダーと呼ばれていますが、</a:t>
+            </a:r>
+            <a:endParaRPr kumimoji="1" lang="en-US" altLang="ja-JP" sz="2400" dirty="0"/>
+          </a:p>
+          <a:p>
+            <a:r>
+              <a:rPr lang="ja-JP" altLang="en-US" sz="2400" dirty="0"/>
+              <a:t>　ほぼピクセルシェーダーと思っていただいて大丈夫です。</a:t>
             </a:r>
             <a:endParaRPr kumimoji="1" lang="en-US" altLang="ja-JP" sz="2400" dirty="0"/>
           </a:p>
